--- a/Проект_презентация.pptx
+++ b/Проект_презентация.pptx
@@ -15,8 +15,8 @@
     <p:sldId id="260" r:id="rId6"/>
     <p:sldId id="261" r:id="rId7"/>
     <p:sldId id="262" r:id="rId8"/>
-    <p:sldId id="263" r:id="rId9"/>
-    <p:sldId id="265" r:id="rId10"/>
+    <p:sldId id="265" r:id="rId9"/>
+    <p:sldId id="263" r:id="rId10"/>
     <p:sldId id="264" r:id="rId11"/>
   </p:sldIdLst>
   <p:sldSz cx="12192000" cy="6858000"/>
@@ -1556,7 +1556,7 @@
   <p:cSld>
     <p:spTree>
       <p:nvGrpSpPr>
-        <p:cNvPr id="1" name="Shape 180"/>
+        <p:cNvPr id="1" name="Shape 212"/>
         <p:cNvGrpSpPr/>
         <p:nvPr/>
       </p:nvGrpSpPr>
@@ -1570,7 +1570,7 @@
       </p:grpSpPr>
       <p:sp>
         <p:nvSpPr>
-          <p:cNvPr id="181" name="Google Shape;181;p8:notes"/>
+          <p:cNvPr id="213" name="Google Shape;213;p10:notes"/>
           <p:cNvSpPr txBox="1">
             <a:spLocks noGrp="1"/>
           </p:cNvSpPr>
@@ -1608,7 +1608,7 @@
       </p:sp>
       <p:sp>
         <p:nvSpPr>
-          <p:cNvPr id="182" name="Google Shape;182;p8:notes"/>
+          <p:cNvPr id="214" name="Google Shape;214;p10:notes"/>
           <p:cNvSpPr>
             <a:spLocks noGrp="1" noRot="1" noChangeAspect="1"/>
           </p:cNvSpPr>
@@ -1660,7 +1660,7 @@
   <p:cSld>
     <p:spTree>
       <p:nvGrpSpPr>
-        <p:cNvPr id="1" name="Shape 212"/>
+        <p:cNvPr id="1" name="Shape 180"/>
         <p:cNvGrpSpPr/>
         <p:nvPr/>
       </p:nvGrpSpPr>
@@ -1674,7 +1674,7 @@
       </p:grpSpPr>
       <p:sp>
         <p:nvSpPr>
-          <p:cNvPr id="213" name="Google Shape;213;p10:notes"/>
+          <p:cNvPr id="181" name="Google Shape;181;p8:notes"/>
           <p:cNvSpPr txBox="1">
             <a:spLocks noGrp="1"/>
           </p:cNvSpPr>
@@ -1712,7 +1712,7 @@
       </p:sp>
       <p:sp>
         <p:nvSpPr>
-          <p:cNvPr id="214" name="Google Shape;214;p10:notes"/>
+          <p:cNvPr id="182" name="Google Shape;182;p8:notes"/>
           <p:cNvSpPr>
             <a:spLocks noGrp="1" noRot="1" noChangeAspect="1"/>
           </p:cNvSpPr>
@@ -19169,1556 +19169,6 @@
     </p:bg>
     <p:spTree>
       <p:nvGrpSpPr>
-        <p:cNvPr id="1" name="Shape 183"/>
-        <p:cNvGrpSpPr/>
-        <p:nvPr/>
-      </p:nvGrpSpPr>
-      <p:grpSpPr>
-        <a:xfrm>
-          <a:off x="0" y="0"/>
-          <a:ext cx="0" cy="0"/>
-          <a:chOff x="0" y="0"/>
-          <a:chExt cx="0" cy="0"/>
-        </a:xfrm>
-      </p:grpSpPr>
-      <p:pic>
-        <p:nvPicPr>
-          <p:cNvPr id="184" name="Google Shape;184;p20" descr="image.png"/>
-          <p:cNvPicPr preferRelativeResize="0"/>
-          <p:nvPr/>
-        </p:nvPicPr>
-        <p:blipFill rotWithShape="1">
-          <a:blip r:embed="rId3">
-            <a:alphaModFix/>
-          </a:blip>
-          <a:srcRect/>
-          <a:stretch/>
-        </p:blipFill>
-        <p:spPr>
-          <a:xfrm>
-            <a:off x="0" y="0"/>
-            <a:ext cx="12192000" cy="6858000"/>
-          </a:xfrm>
-          <a:prstGeom prst="rect">
-            <a:avLst/>
-          </a:prstGeom>
-          <a:noFill/>
-          <a:ln>
-            <a:noFill/>
-          </a:ln>
-        </p:spPr>
-      </p:pic>
-      <p:sp>
-        <p:nvSpPr>
-          <p:cNvPr id="185" name="Google Shape;185;p20"/>
-          <p:cNvSpPr/>
-          <p:nvPr/>
-        </p:nvSpPr>
-        <p:spPr>
-          <a:xfrm>
-            <a:off x="571500" y="4171950"/>
-            <a:ext cx="11049000" cy="38100"/>
-          </a:xfrm>
-          <a:prstGeom prst="rect">
-            <a:avLst/>
-          </a:prstGeom>
-          <a:solidFill>
-            <a:srgbClr val="38BDF8"/>
-          </a:solidFill>
-          <a:ln>
-            <a:noFill/>
-          </a:ln>
-        </p:spPr>
-        <p:txBody>
-          <a:bodyPr spcFirstLastPara="1" wrap="square" lIns="91425" tIns="45700" rIns="91425" bIns="45700" anchor="ctr" anchorCtr="0">
-            <a:noAutofit/>
-          </a:bodyPr>
-          <a:lstStyle/>
-          <a:p>
-            <a:pPr marL="0" marR="0" lvl="0" indent="0" algn="ctr" rtl="0">
-              <a:spcBef>
-                <a:spcPts val="0"/>
-              </a:spcBef>
-              <a:spcAft>
-                <a:spcPts val="0"/>
-              </a:spcAft>
-              <a:buNone/>
-            </a:pPr>
-            <a:endParaRPr sz="1800" b="0" i="0" u="none" strike="noStrike" cap="none">
-              <a:solidFill>
-                <a:schemeClr val="dk1"/>
-              </a:solidFill>
-              <a:latin typeface="Calibri" panose="020F0502020204030204" pitchFamily="34" charset="0"/>
-              <a:ea typeface="Calibri" panose="020F0502020204030204" pitchFamily="34" charset="0"/>
-              <a:cs typeface="Calibri" panose="020F0502020204030204" pitchFamily="34" charset="0"/>
-              <a:sym typeface="Calibri"/>
-            </a:endParaRPr>
-          </a:p>
-        </p:txBody>
-      </p:sp>
-      <p:sp>
-        <p:nvSpPr>
-          <p:cNvPr id="186" name="Google Shape;186;p20"/>
-          <p:cNvSpPr txBox="1"/>
-          <p:nvPr/>
-        </p:nvSpPr>
-        <p:spPr>
-          <a:xfrm>
-            <a:off x="657987" y="4524375"/>
-            <a:ext cx="2368264" cy="369332"/>
-          </a:xfrm>
-          <a:prstGeom prst="rect">
-            <a:avLst/>
-          </a:prstGeom>
-          <a:noFill/>
-          <a:ln>
-            <a:noFill/>
-          </a:ln>
-        </p:spPr>
-        <p:txBody>
-          <a:bodyPr spcFirstLastPara="1" wrap="square" lIns="0" tIns="0" rIns="0" bIns="0" anchor="t" anchorCtr="0">
-            <a:spAutoFit/>
-          </a:bodyPr>
-          <a:lstStyle/>
-          <a:p>
-            <a:pPr marL="0" marR="0" lvl="0" indent="0" algn="ctr" rtl="0">
-              <a:spcBef>
-                <a:spcPts val="0"/>
-              </a:spcBef>
-              <a:spcAft>
-                <a:spcPts val="0"/>
-              </a:spcAft>
-              <a:buNone/>
-            </a:pPr>
-            <a:r>
-              <a:rPr lang="en-US" sz="2400" b="0" i="0" u="none" strike="noStrike" cap="none" dirty="0" err="1">
-                <a:solidFill>
-                  <a:srgbClr val="F8FAFC"/>
-                </a:solidFill>
-                <a:latin typeface="Calibri" panose="020F0502020204030204" pitchFamily="34" charset="0"/>
-                <a:ea typeface="Calibri" panose="020F0502020204030204" pitchFamily="34" charset="0"/>
-                <a:cs typeface="Calibri" panose="020F0502020204030204" pitchFamily="34" charset="0"/>
-                <a:sym typeface="Poppins SemiBold"/>
-              </a:rPr>
-              <a:t>Конфигурации</a:t>
-            </a:r>
-            <a:endParaRPr sz="2400" dirty="0">
-              <a:latin typeface="Calibri" panose="020F0502020204030204" pitchFamily="34" charset="0"/>
-              <a:ea typeface="Calibri" panose="020F0502020204030204" pitchFamily="34" charset="0"/>
-              <a:cs typeface="Calibri" panose="020F0502020204030204" pitchFamily="34" charset="0"/>
-            </a:endParaRPr>
-          </a:p>
-        </p:txBody>
-      </p:sp>
-      <p:sp>
-        <p:nvSpPr>
-          <p:cNvPr id="187" name="Google Shape;187;p20"/>
-          <p:cNvSpPr txBox="1"/>
-          <p:nvPr/>
-        </p:nvSpPr>
-        <p:spPr>
-          <a:xfrm>
-            <a:off x="714375" y="4933950"/>
-            <a:ext cx="2255490" cy="1231106"/>
-          </a:xfrm>
-          <a:prstGeom prst="rect">
-            <a:avLst/>
-          </a:prstGeom>
-          <a:noFill/>
-          <a:ln>
-            <a:noFill/>
-          </a:ln>
-        </p:spPr>
-        <p:txBody>
-          <a:bodyPr spcFirstLastPara="1" wrap="square" lIns="0" tIns="0" rIns="0" bIns="0" anchor="t" anchorCtr="0">
-            <a:spAutoFit/>
-          </a:bodyPr>
-          <a:lstStyle/>
-          <a:p>
-            <a:pPr marL="0" marR="0" lvl="0" indent="0" algn="ctr" rtl="0">
-              <a:spcBef>
-                <a:spcPts val="0"/>
-              </a:spcBef>
-              <a:spcAft>
-                <a:spcPts val="0"/>
-              </a:spcAft>
-              <a:buNone/>
-            </a:pPr>
-            <a:r>
-              <a:rPr lang="en-US" sz="1600" b="0" i="0" u="none" strike="noStrike" cap="none" dirty="0" err="1">
-                <a:solidFill>
-                  <a:srgbClr val="94A3B8"/>
-                </a:solidFill>
-                <a:latin typeface="Calibri" panose="020F0502020204030204" pitchFamily="34" charset="0"/>
-                <a:ea typeface="Calibri" panose="020F0502020204030204" pitchFamily="34" charset="0"/>
-                <a:cs typeface="Calibri" panose="020F0502020204030204" pitchFamily="34" charset="0"/>
-                <a:sym typeface="Inter"/>
-              </a:rPr>
-              <a:t>Интеграция</a:t>
-            </a:r>
-            <a:r>
-              <a:rPr lang="en-US" sz="1600" b="0" i="0" u="none" strike="noStrike" cap="none" dirty="0">
-                <a:solidFill>
-                  <a:srgbClr val="94A3B8"/>
-                </a:solidFill>
-                <a:latin typeface="Calibri" panose="020F0502020204030204" pitchFamily="34" charset="0"/>
-                <a:ea typeface="Calibri" panose="020F0502020204030204" pitchFamily="34" charset="0"/>
-                <a:cs typeface="Calibri" panose="020F0502020204030204" pitchFamily="34" charset="0"/>
-                <a:sym typeface="Inter"/>
-              </a:rPr>
-              <a:t> JSON-</a:t>
-            </a:r>
-            <a:r>
-              <a:rPr lang="en-US" sz="1600" b="0" i="0" u="none" strike="noStrike" cap="none" dirty="0" err="1">
-                <a:solidFill>
-                  <a:srgbClr val="94A3B8"/>
-                </a:solidFill>
-                <a:latin typeface="Calibri" panose="020F0502020204030204" pitchFamily="34" charset="0"/>
-                <a:ea typeface="Calibri" panose="020F0502020204030204" pitchFamily="34" charset="0"/>
-                <a:cs typeface="Calibri" panose="020F0502020204030204" pitchFamily="34" charset="0"/>
-                <a:sym typeface="Inter"/>
-              </a:rPr>
-              <a:t>словарей</a:t>
-            </a:r>
-            <a:r>
-              <a:rPr lang="en-US" sz="1600" b="0" i="0" u="none" strike="noStrike" cap="none" dirty="0">
-                <a:solidFill>
-                  <a:srgbClr val="94A3B8"/>
-                </a:solidFill>
-                <a:latin typeface="Calibri" panose="020F0502020204030204" pitchFamily="34" charset="0"/>
-                <a:ea typeface="Calibri" panose="020F0502020204030204" pitchFamily="34" charset="0"/>
-                <a:cs typeface="Calibri" panose="020F0502020204030204" pitchFamily="34" charset="0"/>
-                <a:sym typeface="Inter"/>
-              </a:rPr>
-              <a:t> </a:t>
-            </a:r>
-            <a:r>
-              <a:rPr lang="en-US" sz="1600" b="0" i="0" u="none" strike="noStrike" cap="none" dirty="0" err="1">
-                <a:solidFill>
-                  <a:srgbClr val="94A3B8"/>
-                </a:solidFill>
-                <a:latin typeface="Calibri" panose="020F0502020204030204" pitchFamily="34" charset="0"/>
-                <a:ea typeface="Calibri" panose="020F0502020204030204" pitchFamily="34" charset="0"/>
-                <a:cs typeface="Calibri" panose="020F0502020204030204" pitchFamily="34" charset="0"/>
-                <a:sym typeface="Inter"/>
-              </a:rPr>
-              <a:t>для</a:t>
-            </a:r>
-            <a:r>
-              <a:rPr lang="en-US" sz="1600" b="0" i="0" u="none" strike="noStrike" cap="none" dirty="0">
-                <a:solidFill>
-                  <a:srgbClr val="94A3B8"/>
-                </a:solidFill>
-                <a:latin typeface="Calibri" panose="020F0502020204030204" pitchFamily="34" charset="0"/>
-                <a:ea typeface="Calibri" panose="020F0502020204030204" pitchFamily="34" charset="0"/>
-                <a:cs typeface="Calibri" panose="020F0502020204030204" pitchFamily="34" charset="0"/>
-                <a:sym typeface="Inter"/>
-              </a:rPr>
-              <a:t> </a:t>
-            </a:r>
-            <a:r>
-              <a:rPr lang="en-US" sz="1600" b="0" i="0" u="none" strike="noStrike" cap="none" dirty="0" err="1">
-                <a:solidFill>
-                  <a:srgbClr val="94A3B8"/>
-                </a:solidFill>
-                <a:latin typeface="Calibri" panose="020F0502020204030204" pitchFamily="34" charset="0"/>
-                <a:ea typeface="Calibri" panose="020F0502020204030204" pitchFamily="34" charset="0"/>
-                <a:cs typeface="Calibri" panose="020F0502020204030204" pitchFamily="34" charset="0"/>
-                <a:sym typeface="Inter"/>
-              </a:rPr>
-              <a:t>гибкой</a:t>
-            </a:r>
-            <a:r>
-              <a:rPr lang="en-US" sz="1600" b="0" i="0" u="none" strike="noStrike" cap="none" dirty="0">
-                <a:solidFill>
-                  <a:srgbClr val="94A3B8"/>
-                </a:solidFill>
-                <a:latin typeface="Calibri" panose="020F0502020204030204" pitchFamily="34" charset="0"/>
-                <a:ea typeface="Calibri" panose="020F0502020204030204" pitchFamily="34" charset="0"/>
-                <a:cs typeface="Calibri" panose="020F0502020204030204" pitchFamily="34" charset="0"/>
-                <a:sym typeface="Inter"/>
-              </a:rPr>
-              <a:t> </a:t>
-            </a:r>
-            <a:r>
-              <a:rPr lang="en-US" sz="1600" b="0" i="0" u="none" strike="noStrike" cap="none" dirty="0" err="1">
-                <a:solidFill>
-                  <a:srgbClr val="94A3B8"/>
-                </a:solidFill>
-                <a:latin typeface="Calibri" panose="020F0502020204030204" pitchFamily="34" charset="0"/>
-                <a:ea typeface="Calibri" panose="020F0502020204030204" pitchFamily="34" charset="0"/>
-                <a:cs typeface="Calibri" panose="020F0502020204030204" pitchFamily="34" charset="0"/>
-                <a:sym typeface="Inter"/>
-              </a:rPr>
-              <a:t>настройки</a:t>
-            </a:r>
-            <a:r>
-              <a:rPr lang="en-US" sz="1600" b="0" i="0" u="none" strike="noStrike" cap="none" dirty="0">
-                <a:solidFill>
-                  <a:srgbClr val="94A3B8"/>
-                </a:solidFill>
-                <a:latin typeface="Calibri" panose="020F0502020204030204" pitchFamily="34" charset="0"/>
-                <a:ea typeface="Calibri" panose="020F0502020204030204" pitchFamily="34" charset="0"/>
-                <a:cs typeface="Calibri" panose="020F0502020204030204" pitchFamily="34" charset="0"/>
-                <a:sym typeface="Inter"/>
-              </a:rPr>
-              <a:t> </a:t>
-            </a:r>
-            <a:r>
-              <a:rPr lang="en-US" sz="1600" b="0" i="0" u="none" strike="noStrike" cap="none" dirty="0" err="1">
-                <a:solidFill>
-                  <a:srgbClr val="94A3B8"/>
-                </a:solidFill>
-                <a:latin typeface="Calibri" panose="020F0502020204030204" pitchFamily="34" charset="0"/>
-                <a:ea typeface="Calibri" panose="020F0502020204030204" pitchFamily="34" charset="0"/>
-                <a:cs typeface="Calibri" panose="020F0502020204030204" pitchFamily="34" charset="0"/>
-                <a:sym typeface="Inter"/>
-              </a:rPr>
-              <a:t>пользовательских</a:t>
-            </a:r>
-            <a:r>
-              <a:rPr lang="en-US" sz="1600" b="0" i="0" u="none" strike="noStrike" cap="none" dirty="0">
-                <a:solidFill>
-                  <a:srgbClr val="94A3B8"/>
-                </a:solidFill>
-                <a:latin typeface="Calibri" panose="020F0502020204030204" pitchFamily="34" charset="0"/>
-                <a:ea typeface="Calibri" panose="020F0502020204030204" pitchFamily="34" charset="0"/>
-                <a:cs typeface="Calibri" panose="020F0502020204030204" pitchFamily="34" charset="0"/>
-                <a:sym typeface="Inter"/>
-              </a:rPr>
-              <a:t> </a:t>
-            </a:r>
-            <a:r>
-              <a:rPr lang="en-US" sz="1600" b="0" i="0" u="none" strike="noStrike" cap="none" dirty="0" err="1">
-                <a:solidFill>
-                  <a:srgbClr val="94A3B8"/>
-                </a:solidFill>
-                <a:latin typeface="Calibri" panose="020F0502020204030204" pitchFamily="34" charset="0"/>
-                <a:ea typeface="Calibri" panose="020F0502020204030204" pitchFamily="34" charset="0"/>
-                <a:cs typeface="Calibri" panose="020F0502020204030204" pitchFamily="34" charset="0"/>
-                <a:sym typeface="Inter"/>
-              </a:rPr>
-              <a:t>правил</a:t>
-            </a:r>
-            <a:r>
-              <a:rPr lang="en-US" sz="1600" b="0" i="0" u="none" strike="noStrike" cap="none" dirty="0">
-                <a:solidFill>
-                  <a:srgbClr val="94A3B8"/>
-                </a:solidFill>
-                <a:latin typeface="Calibri" panose="020F0502020204030204" pitchFamily="34" charset="0"/>
-                <a:ea typeface="Calibri" panose="020F0502020204030204" pitchFamily="34" charset="0"/>
-                <a:cs typeface="Calibri" panose="020F0502020204030204" pitchFamily="34" charset="0"/>
-                <a:sym typeface="Inter"/>
-              </a:rPr>
-              <a:t> </a:t>
-            </a:r>
-            <a:r>
-              <a:rPr lang="en-US" sz="1600" b="0" i="0" u="none" strike="noStrike" cap="none" dirty="0" err="1">
-                <a:solidFill>
-                  <a:srgbClr val="94A3B8"/>
-                </a:solidFill>
-                <a:latin typeface="Calibri" panose="020F0502020204030204" pitchFamily="34" charset="0"/>
-                <a:ea typeface="Calibri" panose="020F0502020204030204" pitchFamily="34" charset="0"/>
-                <a:cs typeface="Calibri" panose="020F0502020204030204" pitchFamily="34" charset="0"/>
-                <a:sym typeface="Inter"/>
-              </a:rPr>
-              <a:t>без</a:t>
-            </a:r>
-            <a:r>
-              <a:rPr lang="en-US" sz="1600" b="0" i="0" u="none" strike="noStrike" cap="none" dirty="0">
-                <a:solidFill>
-                  <a:srgbClr val="94A3B8"/>
-                </a:solidFill>
-                <a:latin typeface="Calibri" panose="020F0502020204030204" pitchFamily="34" charset="0"/>
-                <a:ea typeface="Calibri" panose="020F0502020204030204" pitchFamily="34" charset="0"/>
-                <a:cs typeface="Calibri" panose="020F0502020204030204" pitchFamily="34" charset="0"/>
-                <a:sym typeface="Inter"/>
-              </a:rPr>
-              <a:t> </a:t>
-            </a:r>
-            <a:r>
-              <a:rPr lang="en-US" sz="1600" b="0" i="0" u="none" strike="noStrike" cap="none" dirty="0" err="1">
-                <a:solidFill>
-                  <a:srgbClr val="94A3B8"/>
-                </a:solidFill>
-                <a:latin typeface="Calibri" panose="020F0502020204030204" pitchFamily="34" charset="0"/>
-                <a:ea typeface="Calibri" panose="020F0502020204030204" pitchFamily="34" charset="0"/>
-                <a:cs typeface="Calibri" panose="020F0502020204030204" pitchFamily="34" charset="0"/>
-                <a:sym typeface="Inter"/>
-              </a:rPr>
-              <a:t>вмешательства</a:t>
-            </a:r>
-            <a:r>
-              <a:rPr lang="en-US" sz="1600" b="0" i="0" u="none" strike="noStrike" cap="none" dirty="0">
-                <a:solidFill>
-                  <a:srgbClr val="94A3B8"/>
-                </a:solidFill>
-                <a:latin typeface="Calibri" panose="020F0502020204030204" pitchFamily="34" charset="0"/>
-                <a:ea typeface="Calibri" panose="020F0502020204030204" pitchFamily="34" charset="0"/>
-                <a:cs typeface="Calibri" panose="020F0502020204030204" pitchFamily="34" charset="0"/>
-                <a:sym typeface="Inter"/>
-              </a:rPr>
-              <a:t> в </a:t>
-            </a:r>
-            <a:r>
-              <a:rPr lang="en-US" sz="1600" b="0" i="0" u="none" strike="noStrike" cap="none" dirty="0" err="1">
-                <a:solidFill>
-                  <a:srgbClr val="94A3B8"/>
-                </a:solidFill>
-                <a:latin typeface="Calibri" panose="020F0502020204030204" pitchFamily="34" charset="0"/>
-                <a:ea typeface="Calibri" panose="020F0502020204030204" pitchFamily="34" charset="0"/>
-                <a:cs typeface="Calibri" panose="020F0502020204030204" pitchFamily="34" charset="0"/>
-                <a:sym typeface="Inter"/>
-              </a:rPr>
-              <a:t>код</a:t>
-            </a:r>
-            <a:r>
-              <a:rPr lang="en-US" sz="1600" b="0" i="0" u="none" strike="noStrike" cap="none" dirty="0">
-                <a:solidFill>
-                  <a:srgbClr val="94A3B8"/>
-                </a:solidFill>
-                <a:latin typeface="Calibri" panose="020F0502020204030204" pitchFamily="34" charset="0"/>
-                <a:ea typeface="Calibri" panose="020F0502020204030204" pitchFamily="34" charset="0"/>
-                <a:cs typeface="Calibri" panose="020F0502020204030204" pitchFamily="34" charset="0"/>
-                <a:sym typeface="Inter"/>
-              </a:rPr>
-              <a:t>.</a:t>
-            </a:r>
-            <a:endParaRPr sz="1600" dirty="0">
-              <a:latin typeface="Calibri" panose="020F0502020204030204" pitchFamily="34" charset="0"/>
-              <a:ea typeface="Calibri" panose="020F0502020204030204" pitchFamily="34" charset="0"/>
-              <a:cs typeface="Calibri" panose="020F0502020204030204" pitchFamily="34" charset="0"/>
-            </a:endParaRPr>
-          </a:p>
-        </p:txBody>
-      </p:sp>
-      <p:sp>
-        <p:nvSpPr>
-          <p:cNvPr id="188" name="Google Shape;188;p20"/>
-          <p:cNvSpPr txBox="1"/>
-          <p:nvPr/>
-        </p:nvSpPr>
-        <p:spPr>
-          <a:xfrm>
-            <a:off x="3493907" y="2330053"/>
-            <a:ext cx="2368264" cy="369332"/>
-          </a:xfrm>
-          <a:prstGeom prst="rect">
-            <a:avLst/>
-          </a:prstGeom>
-          <a:noFill/>
-          <a:ln>
-            <a:noFill/>
-          </a:ln>
-        </p:spPr>
-        <p:txBody>
-          <a:bodyPr spcFirstLastPara="1" wrap="square" lIns="0" tIns="0" rIns="0" bIns="0" anchor="t" anchorCtr="0">
-            <a:spAutoFit/>
-          </a:bodyPr>
-          <a:lstStyle/>
-          <a:p>
-            <a:pPr marL="0" marR="0" lvl="0" indent="0" algn="ctr" rtl="0">
-              <a:spcBef>
-                <a:spcPts val="0"/>
-              </a:spcBef>
-              <a:spcAft>
-                <a:spcPts val="0"/>
-              </a:spcAft>
-              <a:buNone/>
-            </a:pPr>
-            <a:r>
-              <a:rPr lang="en-US" sz="2400" b="0" i="0" u="none" strike="noStrike" cap="none" dirty="0">
-                <a:solidFill>
-                  <a:srgbClr val="F8FAFC"/>
-                </a:solidFill>
-                <a:latin typeface="Calibri" panose="020F0502020204030204" pitchFamily="34" charset="0"/>
-                <a:ea typeface="Calibri" panose="020F0502020204030204" pitchFamily="34" charset="0"/>
-                <a:cs typeface="Calibri" panose="020F0502020204030204" pitchFamily="34" charset="0"/>
-                <a:sym typeface="Poppins SemiBold"/>
-              </a:rPr>
-              <a:t>System Tray</a:t>
-            </a:r>
-            <a:endParaRPr sz="2400" dirty="0">
-              <a:latin typeface="Calibri" panose="020F0502020204030204" pitchFamily="34" charset="0"/>
-              <a:ea typeface="Calibri" panose="020F0502020204030204" pitchFamily="34" charset="0"/>
-              <a:cs typeface="Calibri" panose="020F0502020204030204" pitchFamily="34" charset="0"/>
-            </a:endParaRPr>
-          </a:p>
-        </p:txBody>
-      </p:sp>
-      <p:sp>
-        <p:nvSpPr>
-          <p:cNvPr id="189" name="Google Shape;189;p20"/>
-          <p:cNvSpPr txBox="1"/>
-          <p:nvPr/>
-        </p:nvSpPr>
-        <p:spPr>
-          <a:xfrm>
-            <a:off x="3550294" y="2739628"/>
-            <a:ext cx="2255490" cy="1231106"/>
-          </a:xfrm>
-          <a:prstGeom prst="rect">
-            <a:avLst/>
-          </a:prstGeom>
-          <a:noFill/>
-          <a:ln>
-            <a:noFill/>
-          </a:ln>
-        </p:spPr>
-        <p:txBody>
-          <a:bodyPr spcFirstLastPara="1" wrap="square" lIns="0" tIns="0" rIns="0" bIns="0" anchor="t" anchorCtr="0">
-            <a:spAutoFit/>
-          </a:bodyPr>
-          <a:lstStyle/>
-          <a:p>
-            <a:pPr marL="0" marR="0" lvl="0" indent="0" algn="ctr" rtl="0">
-              <a:spcBef>
-                <a:spcPts val="0"/>
-              </a:spcBef>
-              <a:spcAft>
-                <a:spcPts val="0"/>
-              </a:spcAft>
-              <a:buNone/>
-            </a:pPr>
-            <a:r>
-              <a:rPr lang="en-US" sz="1600" b="0" i="0" u="none" strike="noStrike" cap="none" dirty="0" err="1">
-                <a:solidFill>
-                  <a:srgbClr val="94A3B8"/>
-                </a:solidFill>
-                <a:latin typeface="Calibri" panose="020F0502020204030204" pitchFamily="34" charset="0"/>
-                <a:ea typeface="Calibri" panose="020F0502020204030204" pitchFamily="34" charset="0"/>
-                <a:cs typeface="Calibri" panose="020F0502020204030204" pitchFamily="34" charset="0"/>
-                <a:sym typeface="Inter"/>
-              </a:rPr>
-              <a:t>Создание</a:t>
-            </a:r>
-            <a:r>
-              <a:rPr lang="en-US" sz="1600" b="0" i="0" u="none" strike="noStrike" cap="none" dirty="0">
-                <a:solidFill>
-                  <a:srgbClr val="94A3B8"/>
-                </a:solidFill>
-                <a:latin typeface="Calibri" panose="020F0502020204030204" pitchFamily="34" charset="0"/>
-                <a:ea typeface="Calibri" panose="020F0502020204030204" pitchFamily="34" charset="0"/>
-                <a:cs typeface="Calibri" panose="020F0502020204030204" pitchFamily="34" charset="0"/>
-                <a:sym typeface="Inter"/>
-              </a:rPr>
-              <a:t> </a:t>
-            </a:r>
-            <a:r>
-              <a:rPr lang="en-US" sz="1600" b="0" i="0" u="none" strike="noStrike" cap="none" dirty="0" err="1">
-                <a:solidFill>
-                  <a:srgbClr val="94A3B8"/>
-                </a:solidFill>
-                <a:latin typeface="Calibri" panose="020F0502020204030204" pitchFamily="34" charset="0"/>
-                <a:ea typeface="Calibri" panose="020F0502020204030204" pitchFamily="34" charset="0"/>
-                <a:cs typeface="Calibri" panose="020F0502020204030204" pitchFamily="34" charset="0"/>
-                <a:sym typeface="Inter"/>
-              </a:rPr>
-              <a:t>фонового</a:t>
-            </a:r>
-            <a:r>
-              <a:rPr lang="en-US" sz="1600" b="0" i="0" u="none" strike="noStrike" cap="none" dirty="0">
-                <a:solidFill>
-                  <a:srgbClr val="94A3B8"/>
-                </a:solidFill>
-                <a:latin typeface="Calibri" panose="020F0502020204030204" pitchFamily="34" charset="0"/>
-                <a:ea typeface="Calibri" panose="020F0502020204030204" pitchFamily="34" charset="0"/>
-                <a:cs typeface="Calibri" panose="020F0502020204030204" pitchFamily="34" charset="0"/>
-                <a:sym typeface="Inter"/>
-              </a:rPr>
-              <a:t> </a:t>
-            </a:r>
-            <a:r>
-              <a:rPr lang="en-US" sz="1600" b="0" i="0" u="none" strike="noStrike" cap="none" dirty="0" err="1">
-                <a:solidFill>
-                  <a:srgbClr val="94A3B8"/>
-                </a:solidFill>
-                <a:latin typeface="Calibri" panose="020F0502020204030204" pitchFamily="34" charset="0"/>
-                <a:ea typeface="Calibri" panose="020F0502020204030204" pitchFamily="34" charset="0"/>
-                <a:cs typeface="Calibri" panose="020F0502020204030204" pitchFamily="34" charset="0"/>
-                <a:sym typeface="Inter"/>
-              </a:rPr>
-              <a:t>процесса</a:t>
-            </a:r>
-            <a:r>
-              <a:rPr lang="en-US" sz="1600" b="0" i="0" u="none" strike="noStrike" cap="none" dirty="0">
-                <a:solidFill>
-                  <a:srgbClr val="94A3B8"/>
-                </a:solidFill>
-                <a:latin typeface="Calibri" panose="020F0502020204030204" pitchFamily="34" charset="0"/>
-                <a:ea typeface="Calibri" panose="020F0502020204030204" pitchFamily="34" charset="0"/>
-                <a:cs typeface="Calibri" panose="020F0502020204030204" pitchFamily="34" charset="0"/>
-                <a:sym typeface="Inter"/>
-              </a:rPr>
-              <a:t> с </a:t>
-            </a:r>
-            <a:r>
-              <a:rPr lang="en-US" sz="1600" b="0" i="0" u="none" strike="noStrike" cap="none" dirty="0" err="1">
-                <a:solidFill>
-                  <a:srgbClr val="94A3B8"/>
-                </a:solidFill>
-                <a:latin typeface="Calibri" panose="020F0502020204030204" pitchFamily="34" charset="0"/>
-                <a:ea typeface="Calibri" panose="020F0502020204030204" pitchFamily="34" charset="0"/>
-                <a:cs typeface="Calibri" panose="020F0502020204030204" pitchFamily="34" charset="0"/>
-                <a:sym typeface="Inter"/>
-              </a:rPr>
-              <a:t>иконкой</a:t>
-            </a:r>
-            <a:r>
-              <a:rPr lang="en-US" sz="1600" b="0" i="0" u="none" strike="noStrike" cap="none" dirty="0">
-                <a:solidFill>
-                  <a:srgbClr val="94A3B8"/>
-                </a:solidFill>
-                <a:latin typeface="Calibri" panose="020F0502020204030204" pitchFamily="34" charset="0"/>
-                <a:ea typeface="Calibri" panose="020F0502020204030204" pitchFamily="34" charset="0"/>
-                <a:cs typeface="Calibri" panose="020F0502020204030204" pitchFamily="34" charset="0"/>
-                <a:sym typeface="Inter"/>
-              </a:rPr>
-              <a:t> </a:t>
-            </a:r>
-            <a:r>
-              <a:rPr lang="en-US" sz="1600" b="0" i="0" u="none" strike="noStrike" cap="none" dirty="0" err="1">
-                <a:solidFill>
-                  <a:srgbClr val="94A3B8"/>
-                </a:solidFill>
-                <a:latin typeface="Calibri" panose="020F0502020204030204" pitchFamily="34" charset="0"/>
-                <a:ea typeface="Calibri" panose="020F0502020204030204" pitchFamily="34" charset="0"/>
-                <a:cs typeface="Calibri" panose="020F0502020204030204" pitchFamily="34" charset="0"/>
-                <a:sym typeface="Inter"/>
-              </a:rPr>
-              <a:t>для</a:t>
-            </a:r>
-            <a:r>
-              <a:rPr lang="en-US" sz="1600" b="0" i="0" u="none" strike="noStrike" cap="none" dirty="0">
-                <a:solidFill>
-                  <a:srgbClr val="94A3B8"/>
-                </a:solidFill>
-                <a:latin typeface="Calibri" panose="020F0502020204030204" pitchFamily="34" charset="0"/>
-                <a:ea typeface="Calibri" panose="020F0502020204030204" pitchFamily="34" charset="0"/>
-                <a:cs typeface="Calibri" panose="020F0502020204030204" pitchFamily="34" charset="0"/>
-                <a:sym typeface="Inter"/>
-              </a:rPr>
-              <a:t> </a:t>
-            </a:r>
-            <a:r>
-              <a:rPr lang="en-US" sz="1600" b="0" i="0" u="none" strike="noStrike" cap="none" dirty="0" err="1">
-                <a:solidFill>
-                  <a:srgbClr val="94A3B8"/>
-                </a:solidFill>
-                <a:latin typeface="Calibri" panose="020F0502020204030204" pitchFamily="34" charset="0"/>
-                <a:ea typeface="Calibri" panose="020F0502020204030204" pitchFamily="34" charset="0"/>
-                <a:cs typeface="Calibri" panose="020F0502020204030204" pitchFamily="34" charset="0"/>
-                <a:sym typeface="Inter"/>
-              </a:rPr>
-              <a:t>незаметного</a:t>
-            </a:r>
-            <a:r>
-              <a:rPr lang="en-US" sz="1600" b="0" i="0" u="none" strike="noStrike" cap="none" dirty="0">
-                <a:solidFill>
-                  <a:srgbClr val="94A3B8"/>
-                </a:solidFill>
-                <a:latin typeface="Calibri" panose="020F0502020204030204" pitchFamily="34" charset="0"/>
-                <a:ea typeface="Calibri" panose="020F0502020204030204" pitchFamily="34" charset="0"/>
-                <a:cs typeface="Calibri" panose="020F0502020204030204" pitchFamily="34" charset="0"/>
-                <a:sym typeface="Inter"/>
-              </a:rPr>
-              <a:t> </a:t>
-            </a:r>
-            <a:r>
-              <a:rPr lang="en-US" sz="1600" b="0" i="0" u="none" strike="noStrike" cap="none" dirty="0" err="1">
-                <a:solidFill>
-                  <a:srgbClr val="94A3B8"/>
-                </a:solidFill>
-                <a:latin typeface="Calibri" panose="020F0502020204030204" pitchFamily="34" charset="0"/>
-                <a:ea typeface="Calibri" panose="020F0502020204030204" pitchFamily="34" charset="0"/>
-                <a:cs typeface="Calibri" panose="020F0502020204030204" pitchFamily="34" charset="0"/>
-                <a:sym typeface="Inter"/>
-              </a:rPr>
-              <a:t>авто-управления</a:t>
-            </a:r>
-            <a:r>
-              <a:rPr lang="en-US" sz="1600" b="0" i="0" u="none" strike="noStrike" cap="none" dirty="0">
-                <a:solidFill>
-                  <a:srgbClr val="94A3B8"/>
-                </a:solidFill>
-                <a:latin typeface="Calibri" panose="020F0502020204030204" pitchFamily="34" charset="0"/>
-                <a:ea typeface="Calibri" panose="020F0502020204030204" pitchFamily="34" charset="0"/>
-                <a:cs typeface="Calibri" panose="020F0502020204030204" pitchFamily="34" charset="0"/>
-                <a:sym typeface="Inter"/>
-              </a:rPr>
-              <a:t> </a:t>
-            </a:r>
-            <a:r>
-              <a:rPr lang="en-US" sz="1600" b="0" i="0" u="none" strike="noStrike" cap="none" dirty="0" err="1">
-                <a:solidFill>
-                  <a:srgbClr val="94A3B8"/>
-                </a:solidFill>
-                <a:latin typeface="Calibri" panose="020F0502020204030204" pitchFamily="34" charset="0"/>
-                <a:ea typeface="Calibri" panose="020F0502020204030204" pitchFamily="34" charset="0"/>
-                <a:cs typeface="Calibri" panose="020F0502020204030204" pitchFamily="34" charset="0"/>
-                <a:sym typeface="Inter"/>
-              </a:rPr>
-              <a:t>директориями</a:t>
-            </a:r>
-            <a:r>
-              <a:rPr lang="en-US" sz="1600" b="0" i="0" u="none" strike="noStrike" cap="none" dirty="0">
-                <a:solidFill>
-                  <a:srgbClr val="94A3B8"/>
-                </a:solidFill>
-                <a:latin typeface="Calibri" panose="020F0502020204030204" pitchFamily="34" charset="0"/>
-                <a:ea typeface="Calibri" panose="020F0502020204030204" pitchFamily="34" charset="0"/>
-                <a:cs typeface="Calibri" panose="020F0502020204030204" pitchFamily="34" charset="0"/>
-                <a:sym typeface="Inter"/>
-              </a:rPr>
-              <a:t>.</a:t>
-            </a:r>
-            <a:endParaRPr sz="1600" dirty="0">
-              <a:latin typeface="Calibri" panose="020F0502020204030204" pitchFamily="34" charset="0"/>
-              <a:ea typeface="Calibri" panose="020F0502020204030204" pitchFamily="34" charset="0"/>
-              <a:cs typeface="Calibri" panose="020F0502020204030204" pitchFamily="34" charset="0"/>
-            </a:endParaRPr>
-          </a:p>
-        </p:txBody>
-      </p:sp>
-      <p:sp>
-        <p:nvSpPr>
-          <p:cNvPr id="190" name="Google Shape;190;p20"/>
-          <p:cNvSpPr txBox="1"/>
-          <p:nvPr/>
-        </p:nvSpPr>
-        <p:spPr>
-          <a:xfrm>
-            <a:off x="6329827" y="4524375"/>
-            <a:ext cx="2368264" cy="369332"/>
-          </a:xfrm>
-          <a:prstGeom prst="rect">
-            <a:avLst/>
-          </a:prstGeom>
-          <a:noFill/>
-          <a:ln>
-            <a:noFill/>
-          </a:ln>
-        </p:spPr>
-        <p:txBody>
-          <a:bodyPr spcFirstLastPara="1" wrap="square" lIns="0" tIns="0" rIns="0" bIns="0" anchor="t" anchorCtr="0">
-            <a:spAutoFit/>
-          </a:bodyPr>
-          <a:lstStyle/>
-          <a:p>
-            <a:pPr marL="0" marR="0" lvl="0" indent="0" algn="ctr" rtl="0">
-              <a:spcBef>
-                <a:spcPts val="0"/>
-              </a:spcBef>
-              <a:spcAft>
-                <a:spcPts val="0"/>
-              </a:spcAft>
-              <a:buNone/>
-            </a:pPr>
-            <a:r>
-              <a:rPr lang="en-US" sz="2400" b="0" i="0" u="none" strike="noStrike" cap="none" dirty="0" err="1">
-                <a:solidFill>
-                  <a:srgbClr val="F8FAFC"/>
-                </a:solidFill>
-                <a:latin typeface="Calibri" panose="020F0502020204030204" pitchFamily="34" charset="0"/>
-                <a:ea typeface="Calibri" panose="020F0502020204030204" pitchFamily="34" charset="0"/>
-                <a:cs typeface="Calibri" panose="020F0502020204030204" pitchFamily="34" charset="0"/>
-                <a:sym typeface="Poppins SemiBold"/>
-              </a:rPr>
-              <a:t>Интеграция</a:t>
-            </a:r>
-            <a:r>
-              <a:rPr lang="en-US" sz="2400" b="0" i="0" u="none" strike="noStrike" cap="none" dirty="0">
-                <a:solidFill>
-                  <a:srgbClr val="F8FAFC"/>
-                </a:solidFill>
-                <a:latin typeface="Calibri" panose="020F0502020204030204" pitchFamily="34" charset="0"/>
-                <a:ea typeface="Calibri" panose="020F0502020204030204" pitchFamily="34" charset="0"/>
-                <a:cs typeface="Calibri" panose="020F0502020204030204" pitchFamily="34" charset="0"/>
-                <a:sym typeface="Poppins SemiBold"/>
-              </a:rPr>
-              <a:t> LLM</a:t>
-            </a:r>
-            <a:endParaRPr sz="2400" dirty="0">
-              <a:latin typeface="Calibri" panose="020F0502020204030204" pitchFamily="34" charset="0"/>
-              <a:ea typeface="Calibri" panose="020F0502020204030204" pitchFamily="34" charset="0"/>
-              <a:cs typeface="Calibri" panose="020F0502020204030204" pitchFamily="34" charset="0"/>
-            </a:endParaRPr>
-          </a:p>
-        </p:txBody>
-      </p:sp>
-      <p:sp>
-        <p:nvSpPr>
-          <p:cNvPr id="191" name="Google Shape;191;p20"/>
-          <p:cNvSpPr txBox="1"/>
-          <p:nvPr/>
-        </p:nvSpPr>
-        <p:spPr>
-          <a:xfrm>
-            <a:off x="6386214" y="4933950"/>
-            <a:ext cx="2255490" cy="984885"/>
-          </a:xfrm>
-          <a:prstGeom prst="rect">
-            <a:avLst/>
-          </a:prstGeom>
-          <a:noFill/>
-          <a:ln>
-            <a:noFill/>
-          </a:ln>
-        </p:spPr>
-        <p:txBody>
-          <a:bodyPr spcFirstLastPara="1" wrap="square" lIns="0" tIns="0" rIns="0" bIns="0" anchor="t" anchorCtr="0">
-            <a:spAutoFit/>
-          </a:bodyPr>
-          <a:lstStyle/>
-          <a:p>
-            <a:pPr marL="0" marR="0" lvl="0" indent="0" algn="ctr" rtl="0">
-              <a:spcBef>
-                <a:spcPts val="0"/>
-              </a:spcBef>
-              <a:spcAft>
-                <a:spcPts val="0"/>
-              </a:spcAft>
-              <a:buNone/>
-            </a:pPr>
-            <a:r>
-              <a:rPr lang="en-US" sz="1600" b="0" i="0" u="none" strike="noStrike" cap="none" dirty="0" err="1">
-                <a:solidFill>
-                  <a:srgbClr val="94A3B8"/>
-                </a:solidFill>
-                <a:latin typeface="Calibri" panose="020F0502020204030204" pitchFamily="34" charset="0"/>
-                <a:ea typeface="Calibri" panose="020F0502020204030204" pitchFamily="34" charset="0"/>
-                <a:cs typeface="Calibri" panose="020F0502020204030204" pitchFamily="34" charset="0"/>
-                <a:sym typeface="Inter"/>
-              </a:rPr>
-              <a:t>Смысловая</a:t>
-            </a:r>
-            <a:r>
-              <a:rPr lang="en-US" sz="1600" b="0" i="0" u="none" strike="noStrike" cap="none" dirty="0">
-                <a:solidFill>
-                  <a:srgbClr val="94A3B8"/>
-                </a:solidFill>
-                <a:latin typeface="Calibri" panose="020F0502020204030204" pitchFamily="34" charset="0"/>
-                <a:ea typeface="Calibri" panose="020F0502020204030204" pitchFamily="34" charset="0"/>
-                <a:cs typeface="Calibri" panose="020F0502020204030204" pitchFamily="34" charset="0"/>
-                <a:sym typeface="Inter"/>
-              </a:rPr>
-              <a:t> </a:t>
-            </a:r>
-            <a:r>
-              <a:rPr lang="en-US" sz="1600" b="0" i="0" u="none" strike="noStrike" cap="none" dirty="0" err="1">
-                <a:solidFill>
-                  <a:srgbClr val="94A3B8"/>
-                </a:solidFill>
-                <a:latin typeface="Calibri" panose="020F0502020204030204" pitchFamily="34" charset="0"/>
-                <a:ea typeface="Calibri" panose="020F0502020204030204" pitchFamily="34" charset="0"/>
-                <a:cs typeface="Calibri" panose="020F0502020204030204" pitchFamily="34" charset="0"/>
-                <a:sym typeface="Inter"/>
-              </a:rPr>
-              <a:t>классификация</a:t>
-            </a:r>
-            <a:r>
-              <a:rPr lang="en-US" sz="1600" b="0" i="0" u="none" strike="noStrike" cap="none" dirty="0">
-                <a:solidFill>
-                  <a:srgbClr val="94A3B8"/>
-                </a:solidFill>
-                <a:latin typeface="Calibri" panose="020F0502020204030204" pitchFamily="34" charset="0"/>
-                <a:ea typeface="Calibri" panose="020F0502020204030204" pitchFamily="34" charset="0"/>
-                <a:cs typeface="Calibri" panose="020F0502020204030204" pitchFamily="34" charset="0"/>
-                <a:sym typeface="Inter"/>
-              </a:rPr>
-              <a:t> </a:t>
-            </a:r>
-            <a:r>
-              <a:rPr lang="en-US" sz="1600" b="0" i="0" u="none" strike="noStrike" cap="none" dirty="0" err="1">
-                <a:solidFill>
-                  <a:srgbClr val="94A3B8"/>
-                </a:solidFill>
-                <a:latin typeface="Calibri" panose="020F0502020204030204" pitchFamily="34" charset="0"/>
-                <a:ea typeface="Calibri" panose="020F0502020204030204" pitchFamily="34" charset="0"/>
-                <a:cs typeface="Calibri" panose="020F0502020204030204" pitchFamily="34" charset="0"/>
-                <a:sym typeface="Inter"/>
-              </a:rPr>
-              <a:t>документов</a:t>
-            </a:r>
-            <a:r>
-              <a:rPr lang="en-US" sz="1600" b="0" i="0" u="none" strike="noStrike" cap="none" dirty="0">
-                <a:solidFill>
-                  <a:srgbClr val="94A3B8"/>
-                </a:solidFill>
-                <a:latin typeface="Calibri" panose="020F0502020204030204" pitchFamily="34" charset="0"/>
-                <a:ea typeface="Calibri" panose="020F0502020204030204" pitchFamily="34" charset="0"/>
-                <a:cs typeface="Calibri" panose="020F0502020204030204" pitchFamily="34" charset="0"/>
-                <a:sym typeface="Inter"/>
-              </a:rPr>
-              <a:t> с </a:t>
-            </a:r>
-            <a:r>
-              <a:rPr lang="en-US" sz="1600" b="0" i="0" u="none" strike="noStrike" cap="none" dirty="0" err="1">
-                <a:solidFill>
-                  <a:srgbClr val="94A3B8"/>
-                </a:solidFill>
-                <a:latin typeface="Calibri" panose="020F0502020204030204" pitchFamily="34" charset="0"/>
-                <a:ea typeface="Calibri" panose="020F0502020204030204" pitchFamily="34" charset="0"/>
-                <a:cs typeface="Calibri" panose="020F0502020204030204" pitchFamily="34" charset="0"/>
-                <a:sym typeface="Inter"/>
-              </a:rPr>
-              <a:t>помощью</a:t>
-            </a:r>
-            <a:r>
-              <a:rPr lang="en-US" sz="1600" b="0" i="0" u="none" strike="noStrike" cap="none" dirty="0">
-                <a:solidFill>
-                  <a:srgbClr val="94A3B8"/>
-                </a:solidFill>
-                <a:latin typeface="Calibri" panose="020F0502020204030204" pitchFamily="34" charset="0"/>
-                <a:ea typeface="Calibri" panose="020F0502020204030204" pitchFamily="34" charset="0"/>
-                <a:cs typeface="Calibri" panose="020F0502020204030204" pitchFamily="34" charset="0"/>
-                <a:sym typeface="Inter"/>
-              </a:rPr>
-              <a:t> </a:t>
-            </a:r>
-            <a:r>
-              <a:rPr lang="en-US" sz="1600" b="0" i="0" u="none" strike="noStrike" cap="none" dirty="0" err="1">
-                <a:solidFill>
-                  <a:srgbClr val="94A3B8"/>
-                </a:solidFill>
-                <a:latin typeface="Calibri" panose="020F0502020204030204" pitchFamily="34" charset="0"/>
-                <a:ea typeface="Calibri" panose="020F0502020204030204" pitchFamily="34" charset="0"/>
-                <a:cs typeface="Calibri" panose="020F0502020204030204" pitchFamily="34" charset="0"/>
-                <a:sym typeface="Inter"/>
-              </a:rPr>
-              <a:t>нейросетей</a:t>
-            </a:r>
-            <a:r>
-              <a:rPr lang="en-US" sz="1600" b="0" i="0" u="none" strike="noStrike" cap="none" dirty="0">
-                <a:solidFill>
-                  <a:srgbClr val="94A3B8"/>
-                </a:solidFill>
-                <a:latin typeface="Calibri" panose="020F0502020204030204" pitchFamily="34" charset="0"/>
-                <a:ea typeface="Calibri" panose="020F0502020204030204" pitchFamily="34" charset="0"/>
-                <a:cs typeface="Calibri" panose="020F0502020204030204" pitchFamily="34" charset="0"/>
-                <a:sym typeface="Inter"/>
-              </a:rPr>
-              <a:t>.</a:t>
-            </a:r>
-            <a:endParaRPr sz="1600" dirty="0">
-              <a:latin typeface="Calibri" panose="020F0502020204030204" pitchFamily="34" charset="0"/>
-              <a:ea typeface="Calibri" panose="020F0502020204030204" pitchFamily="34" charset="0"/>
-              <a:cs typeface="Calibri" panose="020F0502020204030204" pitchFamily="34" charset="0"/>
-            </a:endParaRPr>
-          </a:p>
-        </p:txBody>
-      </p:sp>
-      <p:sp>
-        <p:nvSpPr>
-          <p:cNvPr id="192" name="Google Shape;192;p20"/>
-          <p:cNvSpPr txBox="1"/>
-          <p:nvPr/>
-        </p:nvSpPr>
-        <p:spPr>
-          <a:xfrm>
-            <a:off x="9165747" y="2330053"/>
-            <a:ext cx="2368264" cy="369332"/>
-          </a:xfrm>
-          <a:prstGeom prst="rect">
-            <a:avLst/>
-          </a:prstGeom>
-          <a:noFill/>
-          <a:ln>
-            <a:noFill/>
-          </a:ln>
-        </p:spPr>
-        <p:txBody>
-          <a:bodyPr spcFirstLastPara="1" wrap="square" lIns="0" tIns="0" rIns="0" bIns="0" anchor="t" anchorCtr="0">
-            <a:spAutoFit/>
-          </a:bodyPr>
-          <a:lstStyle/>
-          <a:p>
-            <a:pPr marL="0" marR="0" lvl="0" indent="0" algn="ctr" rtl="0">
-              <a:spcBef>
-                <a:spcPts val="0"/>
-              </a:spcBef>
-              <a:spcAft>
-                <a:spcPts val="0"/>
-              </a:spcAft>
-              <a:buNone/>
-            </a:pPr>
-            <a:r>
-              <a:rPr lang="en-US" sz="2400" b="0" i="0" u="none" strike="noStrike" cap="none" dirty="0" err="1">
-                <a:solidFill>
-                  <a:srgbClr val="F8FAFC"/>
-                </a:solidFill>
-                <a:latin typeface="Calibri" panose="020F0502020204030204" pitchFamily="34" charset="0"/>
-                <a:ea typeface="Calibri" panose="020F0502020204030204" pitchFamily="34" charset="0"/>
-                <a:cs typeface="Calibri" panose="020F0502020204030204" pitchFamily="34" charset="0"/>
-                <a:sym typeface="Poppins SemiBold"/>
-              </a:rPr>
-              <a:t>Дедупликация</a:t>
-            </a:r>
-            <a:endParaRPr sz="2400" dirty="0">
-              <a:latin typeface="Calibri" panose="020F0502020204030204" pitchFamily="34" charset="0"/>
-              <a:ea typeface="Calibri" panose="020F0502020204030204" pitchFamily="34" charset="0"/>
-              <a:cs typeface="Calibri" panose="020F0502020204030204" pitchFamily="34" charset="0"/>
-            </a:endParaRPr>
-          </a:p>
-        </p:txBody>
-      </p:sp>
-      <p:sp>
-        <p:nvSpPr>
-          <p:cNvPr id="193" name="Google Shape;193;p20"/>
-          <p:cNvSpPr txBox="1"/>
-          <p:nvPr/>
-        </p:nvSpPr>
-        <p:spPr>
-          <a:xfrm>
-            <a:off x="9222134" y="2739628"/>
-            <a:ext cx="2255490" cy="1231106"/>
-          </a:xfrm>
-          <a:prstGeom prst="rect">
-            <a:avLst/>
-          </a:prstGeom>
-          <a:noFill/>
-          <a:ln>
-            <a:noFill/>
-          </a:ln>
-        </p:spPr>
-        <p:txBody>
-          <a:bodyPr spcFirstLastPara="1" wrap="square" lIns="0" tIns="0" rIns="0" bIns="0" anchor="t" anchorCtr="0">
-            <a:spAutoFit/>
-          </a:bodyPr>
-          <a:lstStyle/>
-          <a:p>
-            <a:pPr marL="0" marR="0" lvl="0" indent="0" algn="ctr" rtl="0">
-              <a:spcBef>
-                <a:spcPts val="0"/>
-              </a:spcBef>
-              <a:spcAft>
-                <a:spcPts val="0"/>
-              </a:spcAft>
-              <a:buNone/>
-            </a:pPr>
-            <a:r>
-              <a:rPr lang="en-US" sz="1600" b="0" i="0" u="none" strike="noStrike" cap="none" dirty="0" err="1">
-                <a:solidFill>
-                  <a:srgbClr val="94A3B8"/>
-                </a:solidFill>
-                <a:latin typeface="Calibri" panose="020F0502020204030204" pitchFamily="34" charset="0"/>
-                <a:ea typeface="Calibri" panose="020F0502020204030204" pitchFamily="34" charset="0"/>
-                <a:cs typeface="Calibri" panose="020F0502020204030204" pitchFamily="34" charset="0"/>
-                <a:sym typeface="Inter"/>
-              </a:rPr>
-              <a:t>Внедрение</a:t>
-            </a:r>
-            <a:r>
-              <a:rPr lang="en-US" sz="1600" b="0" i="0" u="none" strike="noStrike" cap="none" dirty="0">
-                <a:solidFill>
-                  <a:srgbClr val="94A3B8"/>
-                </a:solidFill>
-                <a:latin typeface="Calibri" panose="020F0502020204030204" pitchFamily="34" charset="0"/>
-                <a:ea typeface="Calibri" panose="020F0502020204030204" pitchFamily="34" charset="0"/>
-                <a:cs typeface="Calibri" panose="020F0502020204030204" pitchFamily="34" charset="0"/>
-                <a:sym typeface="Inter"/>
-              </a:rPr>
-              <a:t> </a:t>
-            </a:r>
-            <a:r>
-              <a:rPr lang="en-US" sz="1600" b="0" i="0" u="none" strike="noStrike" cap="none" dirty="0" err="1">
-                <a:solidFill>
-                  <a:srgbClr val="94A3B8"/>
-                </a:solidFill>
-                <a:latin typeface="Calibri" panose="020F0502020204030204" pitchFamily="34" charset="0"/>
-                <a:ea typeface="Calibri" panose="020F0502020204030204" pitchFamily="34" charset="0"/>
-                <a:cs typeface="Calibri" panose="020F0502020204030204" pitchFamily="34" charset="0"/>
-                <a:sym typeface="Inter"/>
-              </a:rPr>
-              <a:t>алгоритмов</a:t>
-            </a:r>
-            <a:r>
-              <a:rPr lang="en-US" sz="1600" b="0" i="0" u="none" strike="noStrike" cap="none" dirty="0">
-                <a:solidFill>
-                  <a:srgbClr val="94A3B8"/>
-                </a:solidFill>
-                <a:latin typeface="Calibri" panose="020F0502020204030204" pitchFamily="34" charset="0"/>
-                <a:ea typeface="Calibri" panose="020F0502020204030204" pitchFamily="34" charset="0"/>
-                <a:cs typeface="Calibri" panose="020F0502020204030204" pitchFamily="34" charset="0"/>
-                <a:sym typeface="Inter"/>
-              </a:rPr>
-              <a:t> </a:t>
-            </a:r>
-            <a:r>
-              <a:rPr lang="en-US" sz="1600" b="0" i="0" u="none" strike="noStrike" cap="none" dirty="0" err="1">
-                <a:solidFill>
-                  <a:srgbClr val="94A3B8"/>
-                </a:solidFill>
-                <a:latin typeface="Calibri" panose="020F0502020204030204" pitchFamily="34" charset="0"/>
-                <a:ea typeface="Calibri" panose="020F0502020204030204" pitchFamily="34" charset="0"/>
-                <a:cs typeface="Calibri" panose="020F0502020204030204" pitchFamily="34" charset="0"/>
-                <a:sym typeface="Inter"/>
-              </a:rPr>
-              <a:t>хэширования</a:t>
-            </a:r>
-            <a:r>
-              <a:rPr lang="en-US" sz="1600" b="0" i="0" u="none" strike="noStrike" cap="none" dirty="0">
-                <a:solidFill>
-                  <a:srgbClr val="94A3B8"/>
-                </a:solidFill>
-                <a:latin typeface="Calibri" panose="020F0502020204030204" pitchFamily="34" charset="0"/>
-                <a:ea typeface="Calibri" panose="020F0502020204030204" pitchFamily="34" charset="0"/>
-                <a:cs typeface="Calibri" panose="020F0502020204030204" pitchFamily="34" charset="0"/>
-                <a:sym typeface="Inter"/>
-              </a:rPr>
-              <a:t> (MD5/SHA-256) </a:t>
-            </a:r>
-            <a:r>
-              <a:rPr lang="en-US" sz="1600" b="0" i="0" u="none" strike="noStrike" cap="none" dirty="0" err="1">
-                <a:solidFill>
-                  <a:srgbClr val="94A3B8"/>
-                </a:solidFill>
-                <a:latin typeface="Calibri" panose="020F0502020204030204" pitchFamily="34" charset="0"/>
-                <a:ea typeface="Calibri" panose="020F0502020204030204" pitchFamily="34" charset="0"/>
-                <a:cs typeface="Calibri" panose="020F0502020204030204" pitchFamily="34" charset="0"/>
-                <a:sym typeface="Inter"/>
-              </a:rPr>
-              <a:t>для</a:t>
-            </a:r>
-            <a:r>
-              <a:rPr lang="en-US" sz="1600" b="0" i="0" u="none" strike="noStrike" cap="none" dirty="0">
-                <a:solidFill>
-                  <a:srgbClr val="94A3B8"/>
-                </a:solidFill>
-                <a:latin typeface="Calibri" panose="020F0502020204030204" pitchFamily="34" charset="0"/>
-                <a:ea typeface="Calibri" panose="020F0502020204030204" pitchFamily="34" charset="0"/>
-                <a:cs typeface="Calibri" panose="020F0502020204030204" pitchFamily="34" charset="0"/>
-                <a:sym typeface="Inter"/>
-              </a:rPr>
-              <a:t> </a:t>
-            </a:r>
-            <a:r>
-              <a:rPr lang="en-US" sz="1600" b="0" i="0" u="none" strike="noStrike" cap="none" dirty="0" err="1">
-                <a:solidFill>
-                  <a:srgbClr val="94A3B8"/>
-                </a:solidFill>
-                <a:latin typeface="Calibri" panose="020F0502020204030204" pitchFamily="34" charset="0"/>
-                <a:ea typeface="Calibri" panose="020F0502020204030204" pitchFamily="34" charset="0"/>
-                <a:cs typeface="Calibri" panose="020F0502020204030204" pitchFamily="34" charset="0"/>
-                <a:sym typeface="Inter"/>
-              </a:rPr>
-              <a:t>поиска</a:t>
-            </a:r>
-            <a:r>
-              <a:rPr lang="en-US" sz="1600" b="0" i="0" u="none" strike="noStrike" cap="none" dirty="0">
-                <a:solidFill>
-                  <a:srgbClr val="94A3B8"/>
-                </a:solidFill>
-                <a:latin typeface="Calibri" panose="020F0502020204030204" pitchFamily="34" charset="0"/>
-                <a:ea typeface="Calibri" panose="020F0502020204030204" pitchFamily="34" charset="0"/>
-                <a:cs typeface="Calibri" panose="020F0502020204030204" pitchFamily="34" charset="0"/>
-                <a:sym typeface="Inter"/>
-              </a:rPr>
-              <a:t> и </a:t>
-            </a:r>
-            <a:r>
-              <a:rPr lang="en-US" sz="1600" b="0" i="0" u="none" strike="noStrike" cap="none" dirty="0" err="1">
-                <a:solidFill>
-                  <a:srgbClr val="94A3B8"/>
-                </a:solidFill>
-                <a:latin typeface="Calibri" panose="020F0502020204030204" pitchFamily="34" charset="0"/>
-                <a:ea typeface="Calibri" panose="020F0502020204030204" pitchFamily="34" charset="0"/>
-                <a:cs typeface="Calibri" panose="020F0502020204030204" pitchFamily="34" charset="0"/>
-                <a:sym typeface="Inter"/>
-              </a:rPr>
-              <a:t>зачистки</a:t>
-            </a:r>
-            <a:r>
-              <a:rPr lang="en-US" sz="1600" b="0" i="0" u="none" strike="noStrike" cap="none" dirty="0">
-                <a:solidFill>
-                  <a:srgbClr val="94A3B8"/>
-                </a:solidFill>
-                <a:latin typeface="Calibri" panose="020F0502020204030204" pitchFamily="34" charset="0"/>
-                <a:ea typeface="Calibri" panose="020F0502020204030204" pitchFamily="34" charset="0"/>
-                <a:cs typeface="Calibri" panose="020F0502020204030204" pitchFamily="34" charset="0"/>
-                <a:sym typeface="Inter"/>
-              </a:rPr>
-              <a:t> 100% </a:t>
-            </a:r>
-            <a:r>
-              <a:rPr lang="en-US" sz="1600" b="0" i="0" u="none" strike="noStrike" cap="none" dirty="0" err="1">
-                <a:solidFill>
-                  <a:srgbClr val="94A3B8"/>
-                </a:solidFill>
-                <a:latin typeface="Calibri" panose="020F0502020204030204" pitchFamily="34" charset="0"/>
-                <a:ea typeface="Calibri" panose="020F0502020204030204" pitchFamily="34" charset="0"/>
-                <a:cs typeface="Calibri" panose="020F0502020204030204" pitchFamily="34" charset="0"/>
-                <a:sym typeface="Inter"/>
-              </a:rPr>
-              <a:t>идентичных</a:t>
-            </a:r>
-            <a:r>
-              <a:rPr lang="en-US" sz="1600" b="0" i="0" u="none" strike="noStrike" cap="none" dirty="0">
-                <a:solidFill>
-                  <a:srgbClr val="94A3B8"/>
-                </a:solidFill>
-                <a:latin typeface="Calibri" panose="020F0502020204030204" pitchFamily="34" charset="0"/>
-                <a:ea typeface="Calibri" panose="020F0502020204030204" pitchFamily="34" charset="0"/>
-                <a:cs typeface="Calibri" panose="020F0502020204030204" pitchFamily="34" charset="0"/>
-                <a:sym typeface="Inter"/>
-              </a:rPr>
-              <a:t> </a:t>
-            </a:r>
-            <a:r>
-              <a:rPr lang="en-US" sz="1600" b="0" i="0" u="none" strike="noStrike" cap="none" dirty="0" err="1">
-                <a:solidFill>
-                  <a:srgbClr val="94A3B8"/>
-                </a:solidFill>
-                <a:latin typeface="Calibri" panose="020F0502020204030204" pitchFamily="34" charset="0"/>
-                <a:ea typeface="Calibri" panose="020F0502020204030204" pitchFamily="34" charset="0"/>
-                <a:cs typeface="Calibri" panose="020F0502020204030204" pitchFamily="34" charset="0"/>
-                <a:sym typeface="Inter"/>
-              </a:rPr>
-              <a:t>файлов</a:t>
-            </a:r>
-            <a:r>
-              <a:rPr lang="en-US" sz="1600" b="0" i="0" u="none" strike="noStrike" cap="none" dirty="0">
-                <a:solidFill>
-                  <a:srgbClr val="94A3B8"/>
-                </a:solidFill>
-                <a:latin typeface="Calibri" panose="020F0502020204030204" pitchFamily="34" charset="0"/>
-                <a:ea typeface="Calibri" panose="020F0502020204030204" pitchFamily="34" charset="0"/>
-                <a:cs typeface="Calibri" panose="020F0502020204030204" pitchFamily="34" charset="0"/>
-                <a:sym typeface="Inter"/>
-              </a:rPr>
-              <a:t>.</a:t>
-            </a:r>
-            <a:endParaRPr sz="1600" dirty="0">
-              <a:latin typeface="Calibri" panose="020F0502020204030204" pitchFamily="34" charset="0"/>
-              <a:ea typeface="Calibri" panose="020F0502020204030204" pitchFamily="34" charset="0"/>
-              <a:cs typeface="Calibri" panose="020F0502020204030204" pitchFamily="34" charset="0"/>
-            </a:endParaRPr>
-          </a:p>
-        </p:txBody>
-      </p:sp>
-      <p:sp>
-        <p:nvSpPr>
-          <p:cNvPr id="194" name="Google Shape;194;p20"/>
-          <p:cNvSpPr/>
-          <p:nvPr/>
-        </p:nvSpPr>
-        <p:spPr>
-          <a:xfrm>
-            <a:off x="1727820" y="4076700"/>
-            <a:ext cx="228600" cy="228600"/>
-          </a:xfrm>
-          <a:prstGeom prst="roundRect">
-            <a:avLst>
-              <a:gd name="adj" fmla="val 50000"/>
-            </a:avLst>
-          </a:prstGeom>
-          <a:solidFill>
-            <a:srgbClr val="0B1120"/>
-          </a:solidFill>
-          <a:ln w="38100" cap="flat" cmpd="sng">
-            <a:solidFill>
-              <a:srgbClr val="38BDF8"/>
-            </a:solidFill>
-            <a:prstDash val="solid"/>
-            <a:round/>
-            <a:headEnd type="none" w="sm" len="sm"/>
-            <a:tailEnd type="none" w="sm" len="sm"/>
-          </a:ln>
-        </p:spPr>
-        <p:txBody>
-          <a:bodyPr spcFirstLastPara="1" wrap="square" lIns="91425" tIns="45700" rIns="91425" bIns="45700" anchor="ctr" anchorCtr="0">
-            <a:noAutofit/>
-          </a:bodyPr>
-          <a:lstStyle/>
-          <a:p>
-            <a:pPr marL="0" marR="0" lvl="0" indent="0" algn="ctr" rtl="0">
-              <a:spcBef>
-                <a:spcPts val="0"/>
-              </a:spcBef>
-              <a:spcAft>
-                <a:spcPts val="0"/>
-              </a:spcAft>
-              <a:buNone/>
-            </a:pPr>
-            <a:endParaRPr sz="1800" b="0" i="0" u="none" strike="noStrike" cap="none">
-              <a:solidFill>
-                <a:schemeClr val="dk1"/>
-              </a:solidFill>
-              <a:latin typeface="Calibri" panose="020F0502020204030204" pitchFamily="34" charset="0"/>
-              <a:ea typeface="Calibri" panose="020F0502020204030204" pitchFamily="34" charset="0"/>
-              <a:cs typeface="Calibri" panose="020F0502020204030204" pitchFamily="34" charset="0"/>
-              <a:sym typeface="Calibri"/>
-            </a:endParaRPr>
-          </a:p>
-        </p:txBody>
-      </p:sp>
-      <p:sp>
-        <p:nvSpPr>
-          <p:cNvPr id="195" name="Google Shape;195;p20"/>
-          <p:cNvSpPr/>
-          <p:nvPr/>
-        </p:nvSpPr>
-        <p:spPr>
-          <a:xfrm>
-            <a:off x="4563740" y="4076700"/>
-            <a:ext cx="228600" cy="228600"/>
-          </a:xfrm>
-          <a:prstGeom prst="roundRect">
-            <a:avLst>
-              <a:gd name="adj" fmla="val 50000"/>
-            </a:avLst>
-          </a:prstGeom>
-          <a:solidFill>
-            <a:srgbClr val="0B1120"/>
-          </a:solidFill>
-          <a:ln w="38100" cap="flat" cmpd="sng">
-            <a:solidFill>
-              <a:srgbClr val="38BDF8"/>
-            </a:solidFill>
-            <a:prstDash val="solid"/>
-            <a:round/>
-            <a:headEnd type="none" w="sm" len="sm"/>
-            <a:tailEnd type="none" w="sm" len="sm"/>
-          </a:ln>
-        </p:spPr>
-        <p:txBody>
-          <a:bodyPr spcFirstLastPara="1" wrap="square" lIns="91425" tIns="45700" rIns="91425" bIns="45700" anchor="ctr" anchorCtr="0">
-            <a:noAutofit/>
-          </a:bodyPr>
-          <a:lstStyle/>
-          <a:p>
-            <a:pPr marL="0" marR="0" lvl="0" indent="0" algn="ctr" rtl="0">
-              <a:spcBef>
-                <a:spcPts val="0"/>
-              </a:spcBef>
-              <a:spcAft>
-                <a:spcPts val="0"/>
-              </a:spcAft>
-              <a:buNone/>
-            </a:pPr>
-            <a:endParaRPr sz="1800" b="0" i="0" u="none" strike="noStrike" cap="none">
-              <a:solidFill>
-                <a:schemeClr val="dk1"/>
-              </a:solidFill>
-              <a:latin typeface="Calibri" panose="020F0502020204030204" pitchFamily="34" charset="0"/>
-              <a:ea typeface="Calibri" panose="020F0502020204030204" pitchFamily="34" charset="0"/>
-              <a:cs typeface="Calibri" panose="020F0502020204030204" pitchFamily="34" charset="0"/>
-              <a:sym typeface="Calibri"/>
-            </a:endParaRPr>
-          </a:p>
-        </p:txBody>
-      </p:sp>
-      <p:sp>
-        <p:nvSpPr>
-          <p:cNvPr id="196" name="Google Shape;196;p20"/>
-          <p:cNvSpPr/>
-          <p:nvPr/>
-        </p:nvSpPr>
-        <p:spPr>
-          <a:xfrm>
-            <a:off x="7399659" y="4076700"/>
-            <a:ext cx="228600" cy="228600"/>
-          </a:xfrm>
-          <a:prstGeom prst="roundRect">
-            <a:avLst>
-              <a:gd name="adj" fmla="val 50000"/>
-            </a:avLst>
-          </a:prstGeom>
-          <a:solidFill>
-            <a:srgbClr val="0B1120"/>
-          </a:solidFill>
-          <a:ln w="38100" cap="flat" cmpd="sng">
-            <a:solidFill>
-              <a:srgbClr val="38BDF8"/>
-            </a:solidFill>
-            <a:prstDash val="solid"/>
-            <a:round/>
-            <a:headEnd type="none" w="sm" len="sm"/>
-            <a:tailEnd type="none" w="sm" len="sm"/>
-          </a:ln>
-        </p:spPr>
-        <p:txBody>
-          <a:bodyPr spcFirstLastPara="1" wrap="square" lIns="91425" tIns="45700" rIns="91425" bIns="45700" anchor="ctr" anchorCtr="0">
-            <a:noAutofit/>
-          </a:bodyPr>
-          <a:lstStyle/>
-          <a:p>
-            <a:pPr marL="0" marR="0" lvl="0" indent="0" algn="ctr" rtl="0">
-              <a:spcBef>
-                <a:spcPts val="0"/>
-              </a:spcBef>
-              <a:spcAft>
-                <a:spcPts val="0"/>
-              </a:spcAft>
-              <a:buNone/>
-            </a:pPr>
-            <a:endParaRPr sz="1800" b="0" i="0" u="none" strike="noStrike" cap="none">
-              <a:solidFill>
-                <a:schemeClr val="dk1"/>
-              </a:solidFill>
-              <a:latin typeface="Calibri" panose="020F0502020204030204" pitchFamily="34" charset="0"/>
-              <a:ea typeface="Calibri" panose="020F0502020204030204" pitchFamily="34" charset="0"/>
-              <a:cs typeface="Calibri" panose="020F0502020204030204" pitchFamily="34" charset="0"/>
-              <a:sym typeface="Calibri"/>
-            </a:endParaRPr>
-          </a:p>
-        </p:txBody>
-      </p:sp>
-      <p:sp>
-        <p:nvSpPr>
-          <p:cNvPr id="197" name="Google Shape;197;p20"/>
-          <p:cNvSpPr/>
-          <p:nvPr/>
-        </p:nvSpPr>
-        <p:spPr>
-          <a:xfrm>
-            <a:off x="10235579" y="4076700"/>
-            <a:ext cx="228600" cy="228600"/>
-          </a:xfrm>
-          <a:prstGeom prst="roundRect">
-            <a:avLst>
-              <a:gd name="adj" fmla="val 50000"/>
-            </a:avLst>
-          </a:prstGeom>
-          <a:solidFill>
-            <a:srgbClr val="0B1120"/>
-          </a:solidFill>
-          <a:ln w="38100" cap="flat" cmpd="sng">
-            <a:solidFill>
-              <a:srgbClr val="38BDF8"/>
-            </a:solidFill>
-            <a:prstDash val="solid"/>
-            <a:round/>
-            <a:headEnd type="none" w="sm" len="sm"/>
-            <a:tailEnd type="none" w="sm" len="sm"/>
-          </a:ln>
-        </p:spPr>
-        <p:txBody>
-          <a:bodyPr spcFirstLastPara="1" wrap="square" lIns="91425" tIns="45700" rIns="91425" bIns="45700" anchor="ctr" anchorCtr="0">
-            <a:noAutofit/>
-          </a:bodyPr>
-          <a:lstStyle/>
-          <a:p>
-            <a:pPr marL="0" marR="0" lvl="0" indent="0" algn="ctr" rtl="0">
-              <a:spcBef>
-                <a:spcPts val="0"/>
-              </a:spcBef>
-              <a:spcAft>
-                <a:spcPts val="0"/>
-              </a:spcAft>
-              <a:buNone/>
-            </a:pPr>
-            <a:endParaRPr sz="1800" b="0" i="0" u="none" strike="noStrike" cap="none">
-              <a:solidFill>
-                <a:schemeClr val="dk1"/>
-              </a:solidFill>
-              <a:latin typeface="Calibri" panose="020F0502020204030204" pitchFamily="34" charset="0"/>
-              <a:ea typeface="Calibri" panose="020F0502020204030204" pitchFamily="34" charset="0"/>
-              <a:cs typeface="Calibri" panose="020F0502020204030204" pitchFamily="34" charset="0"/>
-              <a:sym typeface="Calibri"/>
-            </a:endParaRPr>
-          </a:p>
-        </p:txBody>
-      </p:sp>
-      <p:sp>
-        <p:nvSpPr>
-          <p:cNvPr id="198" name="Google Shape;198;p20"/>
-          <p:cNvSpPr txBox="1"/>
-          <p:nvPr/>
-        </p:nvSpPr>
-        <p:spPr>
-          <a:xfrm>
-            <a:off x="571500" y="571500"/>
-            <a:ext cx="11601450" cy="615553"/>
-          </a:xfrm>
-          <a:prstGeom prst="rect">
-            <a:avLst/>
-          </a:prstGeom>
-          <a:noFill/>
-          <a:ln>
-            <a:noFill/>
-          </a:ln>
-        </p:spPr>
-        <p:txBody>
-          <a:bodyPr spcFirstLastPara="1" wrap="square" lIns="0" tIns="0" rIns="0" bIns="0" anchor="t" anchorCtr="0">
-            <a:spAutoFit/>
-          </a:bodyPr>
-          <a:lstStyle/>
-          <a:p>
-            <a:pPr marL="0" marR="0" lvl="0" indent="0" algn="l" rtl="0">
-              <a:spcBef>
-                <a:spcPts val="0"/>
-              </a:spcBef>
-              <a:spcAft>
-                <a:spcPts val="0"/>
-              </a:spcAft>
-              <a:buNone/>
-            </a:pPr>
-            <a:r>
-              <a:rPr lang="en-US" sz="4000" b="0" i="0" u="none" strike="noStrike" cap="none" dirty="0" err="1">
-                <a:solidFill>
-                  <a:srgbClr val="38BDF8"/>
-                </a:solidFill>
-                <a:latin typeface="Calibri" panose="020F0502020204030204" pitchFamily="34" charset="0"/>
-                <a:ea typeface="Calibri" panose="020F0502020204030204" pitchFamily="34" charset="0"/>
-                <a:cs typeface="Calibri" panose="020F0502020204030204" pitchFamily="34" charset="0"/>
-                <a:sym typeface="Poppins SemiBold"/>
-              </a:rPr>
-              <a:t>Перспективы</a:t>
-            </a:r>
-            <a:r>
-              <a:rPr lang="en-US" sz="4000" b="0" i="0" u="none" strike="noStrike" cap="none" dirty="0">
-                <a:solidFill>
-                  <a:srgbClr val="38BDF8"/>
-                </a:solidFill>
-                <a:latin typeface="Calibri" panose="020F0502020204030204" pitchFamily="34" charset="0"/>
-                <a:ea typeface="Calibri" panose="020F0502020204030204" pitchFamily="34" charset="0"/>
-                <a:cs typeface="Calibri" panose="020F0502020204030204" pitchFamily="34" charset="0"/>
-                <a:sym typeface="Poppins SemiBold"/>
-              </a:rPr>
-              <a:t> </a:t>
-            </a:r>
-            <a:r>
-              <a:rPr lang="en-US" sz="4000" b="0" i="0" u="none" strike="noStrike" cap="none" dirty="0" err="1">
-                <a:solidFill>
-                  <a:srgbClr val="38BDF8"/>
-                </a:solidFill>
-                <a:latin typeface="Calibri" panose="020F0502020204030204" pitchFamily="34" charset="0"/>
-                <a:ea typeface="Calibri" panose="020F0502020204030204" pitchFamily="34" charset="0"/>
-                <a:cs typeface="Calibri" panose="020F0502020204030204" pitchFamily="34" charset="0"/>
-                <a:sym typeface="Poppins SemiBold"/>
-              </a:rPr>
-              <a:t>развития</a:t>
-            </a:r>
-            <a:endParaRPr sz="4000" dirty="0">
-              <a:latin typeface="Calibri" panose="020F0502020204030204" pitchFamily="34" charset="0"/>
-              <a:ea typeface="Calibri" panose="020F0502020204030204" pitchFamily="34" charset="0"/>
-              <a:cs typeface="Calibri" panose="020F0502020204030204" pitchFamily="34" charset="0"/>
-            </a:endParaRPr>
-          </a:p>
-        </p:txBody>
-      </p:sp>
-    </p:spTree>
-  </p:cSld>
-  <p:clrMapOvr>
-    <a:masterClrMapping/>
-  </p:clrMapOvr>
-</p:sld>
-</file>
-
-<file path=ppt/slides/slide9.xml><?xml version="1.0" encoding="utf-8"?>
-<p:sld xmlns:a="http://schemas.openxmlformats.org/drawingml/2006/main" xmlns:r="http://schemas.openxmlformats.org/officeDocument/2006/relationships" xmlns:p="http://schemas.openxmlformats.org/presentationml/2006/main">
-  <p:cSld>
-    <p:bg>
-      <p:bgPr>
-        <a:solidFill>
-          <a:srgbClr val="0B1120"/>
-        </a:solidFill>
-        <a:effectLst/>
-      </p:bgPr>
-    </p:bg>
-    <p:spTree>
-      <p:nvGrpSpPr>
         <p:cNvPr id="1" name="Shape 215"/>
         <p:cNvGrpSpPr/>
         <p:nvPr/>
@@ -21935,6 +20385,1556 @@
 </p:sld>
 </file>
 
+<file path=ppt/slides/slide9.xml><?xml version="1.0" encoding="utf-8"?>
+<p:sld xmlns:a="http://schemas.openxmlformats.org/drawingml/2006/main" xmlns:r="http://schemas.openxmlformats.org/officeDocument/2006/relationships" xmlns:p="http://schemas.openxmlformats.org/presentationml/2006/main">
+  <p:cSld>
+    <p:bg>
+      <p:bgPr>
+        <a:solidFill>
+          <a:srgbClr val="0B1120"/>
+        </a:solidFill>
+        <a:effectLst/>
+      </p:bgPr>
+    </p:bg>
+    <p:spTree>
+      <p:nvGrpSpPr>
+        <p:cNvPr id="1" name="Shape 183"/>
+        <p:cNvGrpSpPr/>
+        <p:nvPr/>
+      </p:nvGrpSpPr>
+      <p:grpSpPr>
+        <a:xfrm>
+          <a:off x="0" y="0"/>
+          <a:ext cx="0" cy="0"/>
+          <a:chOff x="0" y="0"/>
+          <a:chExt cx="0" cy="0"/>
+        </a:xfrm>
+      </p:grpSpPr>
+      <p:pic>
+        <p:nvPicPr>
+          <p:cNvPr id="184" name="Google Shape;184;p20" descr="image.png"/>
+          <p:cNvPicPr preferRelativeResize="0"/>
+          <p:nvPr/>
+        </p:nvPicPr>
+        <p:blipFill rotWithShape="1">
+          <a:blip r:embed="rId3">
+            <a:alphaModFix/>
+          </a:blip>
+          <a:srcRect/>
+          <a:stretch/>
+        </p:blipFill>
+        <p:spPr>
+          <a:xfrm>
+            <a:off x="0" y="0"/>
+            <a:ext cx="12192000" cy="6858000"/>
+          </a:xfrm>
+          <a:prstGeom prst="rect">
+            <a:avLst/>
+          </a:prstGeom>
+          <a:noFill/>
+          <a:ln>
+            <a:noFill/>
+          </a:ln>
+        </p:spPr>
+      </p:pic>
+      <p:sp>
+        <p:nvSpPr>
+          <p:cNvPr id="185" name="Google Shape;185;p20"/>
+          <p:cNvSpPr/>
+          <p:nvPr/>
+        </p:nvSpPr>
+        <p:spPr>
+          <a:xfrm>
+            <a:off x="571500" y="4171950"/>
+            <a:ext cx="11049000" cy="38100"/>
+          </a:xfrm>
+          <a:prstGeom prst="rect">
+            <a:avLst/>
+          </a:prstGeom>
+          <a:solidFill>
+            <a:srgbClr val="38BDF8"/>
+          </a:solidFill>
+          <a:ln>
+            <a:noFill/>
+          </a:ln>
+        </p:spPr>
+        <p:txBody>
+          <a:bodyPr spcFirstLastPara="1" wrap="square" lIns="91425" tIns="45700" rIns="91425" bIns="45700" anchor="ctr" anchorCtr="0">
+            <a:noAutofit/>
+          </a:bodyPr>
+          <a:lstStyle/>
+          <a:p>
+            <a:pPr marL="0" marR="0" lvl="0" indent="0" algn="ctr" rtl="0">
+              <a:spcBef>
+                <a:spcPts val="0"/>
+              </a:spcBef>
+              <a:spcAft>
+                <a:spcPts val="0"/>
+              </a:spcAft>
+              <a:buNone/>
+            </a:pPr>
+            <a:endParaRPr sz="1800" b="0" i="0" u="none" strike="noStrike" cap="none">
+              <a:solidFill>
+                <a:schemeClr val="dk1"/>
+              </a:solidFill>
+              <a:latin typeface="Calibri" panose="020F0502020204030204" pitchFamily="34" charset="0"/>
+              <a:ea typeface="Calibri" panose="020F0502020204030204" pitchFamily="34" charset="0"/>
+              <a:cs typeface="Calibri" panose="020F0502020204030204" pitchFamily="34" charset="0"/>
+              <a:sym typeface="Calibri"/>
+            </a:endParaRPr>
+          </a:p>
+        </p:txBody>
+      </p:sp>
+      <p:sp>
+        <p:nvSpPr>
+          <p:cNvPr id="186" name="Google Shape;186;p20"/>
+          <p:cNvSpPr txBox="1"/>
+          <p:nvPr/>
+        </p:nvSpPr>
+        <p:spPr>
+          <a:xfrm>
+            <a:off x="657987" y="4524375"/>
+            <a:ext cx="2368264" cy="369332"/>
+          </a:xfrm>
+          <a:prstGeom prst="rect">
+            <a:avLst/>
+          </a:prstGeom>
+          <a:noFill/>
+          <a:ln>
+            <a:noFill/>
+          </a:ln>
+        </p:spPr>
+        <p:txBody>
+          <a:bodyPr spcFirstLastPara="1" wrap="square" lIns="0" tIns="0" rIns="0" bIns="0" anchor="t" anchorCtr="0">
+            <a:spAutoFit/>
+          </a:bodyPr>
+          <a:lstStyle/>
+          <a:p>
+            <a:pPr marL="0" marR="0" lvl="0" indent="0" algn="ctr" rtl="0">
+              <a:spcBef>
+                <a:spcPts val="0"/>
+              </a:spcBef>
+              <a:spcAft>
+                <a:spcPts val="0"/>
+              </a:spcAft>
+              <a:buNone/>
+            </a:pPr>
+            <a:r>
+              <a:rPr lang="en-US" sz="2400" b="0" i="0" u="none" strike="noStrike" cap="none" dirty="0" err="1">
+                <a:solidFill>
+                  <a:srgbClr val="F8FAFC"/>
+                </a:solidFill>
+                <a:latin typeface="Calibri" panose="020F0502020204030204" pitchFamily="34" charset="0"/>
+                <a:ea typeface="Calibri" panose="020F0502020204030204" pitchFamily="34" charset="0"/>
+                <a:cs typeface="Calibri" panose="020F0502020204030204" pitchFamily="34" charset="0"/>
+                <a:sym typeface="Poppins SemiBold"/>
+              </a:rPr>
+              <a:t>Конфигурации</a:t>
+            </a:r>
+            <a:endParaRPr sz="2400" dirty="0">
+              <a:latin typeface="Calibri" panose="020F0502020204030204" pitchFamily="34" charset="0"/>
+              <a:ea typeface="Calibri" panose="020F0502020204030204" pitchFamily="34" charset="0"/>
+              <a:cs typeface="Calibri" panose="020F0502020204030204" pitchFamily="34" charset="0"/>
+            </a:endParaRPr>
+          </a:p>
+        </p:txBody>
+      </p:sp>
+      <p:sp>
+        <p:nvSpPr>
+          <p:cNvPr id="187" name="Google Shape;187;p20"/>
+          <p:cNvSpPr txBox="1"/>
+          <p:nvPr/>
+        </p:nvSpPr>
+        <p:spPr>
+          <a:xfrm>
+            <a:off x="714375" y="4933950"/>
+            <a:ext cx="2255490" cy="1231106"/>
+          </a:xfrm>
+          <a:prstGeom prst="rect">
+            <a:avLst/>
+          </a:prstGeom>
+          <a:noFill/>
+          <a:ln>
+            <a:noFill/>
+          </a:ln>
+        </p:spPr>
+        <p:txBody>
+          <a:bodyPr spcFirstLastPara="1" wrap="square" lIns="0" tIns="0" rIns="0" bIns="0" anchor="t" anchorCtr="0">
+            <a:spAutoFit/>
+          </a:bodyPr>
+          <a:lstStyle/>
+          <a:p>
+            <a:pPr marL="0" marR="0" lvl="0" indent="0" algn="ctr" rtl="0">
+              <a:spcBef>
+                <a:spcPts val="0"/>
+              </a:spcBef>
+              <a:spcAft>
+                <a:spcPts val="0"/>
+              </a:spcAft>
+              <a:buNone/>
+            </a:pPr>
+            <a:r>
+              <a:rPr lang="en-US" sz="1600" b="0" i="0" u="none" strike="noStrike" cap="none" dirty="0" err="1">
+                <a:solidFill>
+                  <a:srgbClr val="94A3B8"/>
+                </a:solidFill>
+                <a:latin typeface="Calibri" panose="020F0502020204030204" pitchFamily="34" charset="0"/>
+                <a:ea typeface="Calibri" panose="020F0502020204030204" pitchFamily="34" charset="0"/>
+                <a:cs typeface="Calibri" panose="020F0502020204030204" pitchFamily="34" charset="0"/>
+                <a:sym typeface="Inter"/>
+              </a:rPr>
+              <a:t>Интеграция</a:t>
+            </a:r>
+            <a:r>
+              <a:rPr lang="en-US" sz="1600" b="0" i="0" u="none" strike="noStrike" cap="none" dirty="0">
+                <a:solidFill>
+                  <a:srgbClr val="94A3B8"/>
+                </a:solidFill>
+                <a:latin typeface="Calibri" panose="020F0502020204030204" pitchFamily="34" charset="0"/>
+                <a:ea typeface="Calibri" panose="020F0502020204030204" pitchFamily="34" charset="0"/>
+                <a:cs typeface="Calibri" panose="020F0502020204030204" pitchFamily="34" charset="0"/>
+                <a:sym typeface="Inter"/>
+              </a:rPr>
+              <a:t> JSON-</a:t>
+            </a:r>
+            <a:r>
+              <a:rPr lang="en-US" sz="1600" b="0" i="0" u="none" strike="noStrike" cap="none" dirty="0" err="1">
+                <a:solidFill>
+                  <a:srgbClr val="94A3B8"/>
+                </a:solidFill>
+                <a:latin typeface="Calibri" panose="020F0502020204030204" pitchFamily="34" charset="0"/>
+                <a:ea typeface="Calibri" panose="020F0502020204030204" pitchFamily="34" charset="0"/>
+                <a:cs typeface="Calibri" panose="020F0502020204030204" pitchFamily="34" charset="0"/>
+                <a:sym typeface="Inter"/>
+              </a:rPr>
+              <a:t>словарей</a:t>
+            </a:r>
+            <a:r>
+              <a:rPr lang="en-US" sz="1600" b="0" i="0" u="none" strike="noStrike" cap="none" dirty="0">
+                <a:solidFill>
+                  <a:srgbClr val="94A3B8"/>
+                </a:solidFill>
+                <a:latin typeface="Calibri" panose="020F0502020204030204" pitchFamily="34" charset="0"/>
+                <a:ea typeface="Calibri" panose="020F0502020204030204" pitchFamily="34" charset="0"/>
+                <a:cs typeface="Calibri" panose="020F0502020204030204" pitchFamily="34" charset="0"/>
+                <a:sym typeface="Inter"/>
+              </a:rPr>
+              <a:t> </a:t>
+            </a:r>
+            <a:r>
+              <a:rPr lang="en-US" sz="1600" b="0" i="0" u="none" strike="noStrike" cap="none" dirty="0" err="1">
+                <a:solidFill>
+                  <a:srgbClr val="94A3B8"/>
+                </a:solidFill>
+                <a:latin typeface="Calibri" panose="020F0502020204030204" pitchFamily="34" charset="0"/>
+                <a:ea typeface="Calibri" panose="020F0502020204030204" pitchFamily="34" charset="0"/>
+                <a:cs typeface="Calibri" panose="020F0502020204030204" pitchFamily="34" charset="0"/>
+                <a:sym typeface="Inter"/>
+              </a:rPr>
+              <a:t>для</a:t>
+            </a:r>
+            <a:r>
+              <a:rPr lang="en-US" sz="1600" b="0" i="0" u="none" strike="noStrike" cap="none" dirty="0">
+                <a:solidFill>
+                  <a:srgbClr val="94A3B8"/>
+                </a:solidFill>
+                <a:latin typeface="Calibri" panose="020F0502020204030204" pitchFamily="34" charset="0"/>
+                <a:ea typeface="Calibri" panose="020F0502020204030204" pitchFamily="34" charset="0"/>
+                <a:cs typeface="Calibri" panose="020F0502020204030204" pitchFamily="34" charset="0"/>
+                <a:sym typeface="Inter"/>
+              </a:rPr>
+              <a:t> </a:t>
+            </a:r>
+            <a:r>
+              <a:rPr lang="en-US" sz="1600" b="0" i="0" u="none" strike="noStrike" cap="none" dirty="0" err="1">
+                <a:solidFill>
+                  <a:srgbClr val="94A3B8"/>
+                </a:solidFill>
+                <a:latin typeface="Calibri" panose="020F0502020204030204" pitchFamily="34" charset="0"/>
+                <a:ea typeface="Calibri" panose="020F0502020204030204" pitchFamily="34" charset="0"/>
+                <a:cs typeface="Calibri" panose="020F0502020204030204" pitchFamily="34" charset="0"/>
+                <a:sym typeface="Inter"/>
+              </a:rPr>
+              <a:t>гибкой</a:t>
+            </a:r>
+            <a:r>
+              <a:rPr lang="en-US" sz="1600" b="0" i="0" u="none" strike="noStrike" cap="none" dirty="0">
+                <a:solidFill>
+                  <a:srgbClr val="94A3B8"/>
+                </a:solidFill>
+                <a:latin typeface="Calibri" panose="020F0502020204030204" pitchFamily="34" charset="0"/>
+                <a:ea typeface="Calibri" panose="020F0502020204030204" pitchFamily="34" charset="0"/>
+                <a:cs typeface="Calibri" panose="020F0502020204030204" pitchFamily="34" charset="0"/>
+                <a:sym typeface="Inter"/>
+              </a:rPr>
+              <a:t> </a:t>
+            </a:r>
+            <a:r>
+              <a:rPr lang="en-US" sz="1600" b="0" i="0" u="none" strike="noStrike" cap="none" dirty="0" err="1">
+                <a:solidFill>
+                  <a:srgbClr val="94A3B8"/>
+                </a:solidFill>
+                <a:latin typeface="Calibri" panose="020F0502020204030204" pitchFamily="34" charset="0"/>
+                <a:ea typeface="Calibri" panose="020F0502020204030204" pitchFamily="34" charset="0"/>
+                <a:cs typeface="Calibri" panose="020F0502020204030204" pitchFamily="34" charset="0"/>
+                <a:sym typeface="Inter"/>
+              </a:rPr>
+              <a:t>настройки</a:t>
+            </a:r>
+            <a:r>
+              <a:rPr lang="en-US" sz="1600" b="0" i="0" u="none" strike="noStrike" cap="none" dirty="0">
+                <a:solidFill>
+                  <a:srgbClr val="94A3B8"/>
+                </a:solidFill>
+                <a:latin typeface="Calibri" panose="020F0502020204030204" pitchFamily="34" charset="0"/>
+                <a:ea typeface="Calibri" panose="020F0502020204030204" pitchFamily="34" charset="0"/>
+                <a:cs typeface="Calibri" panose="020F0502020204030204" pitchFamily="34" charset="0"/>
+                <a:sym typeface="Inter"/>
+              </a:rPr>
+              <a:t> </a:t>
+            </a:r>
+            <a:r>
+              <a:rPr lang="en-US" sz="1600" b="0" i="0" u="none" strike="noStrike" cap="none" dirty="0" err="1">
+                <a:solidFill>
+                  <a:srgbClr val="94A3B8"/>
+                </a:solidFill>
+                <a:latin typeface="Calibri" panose="020F0502020204030204" pitchFamily="34" charset="0"/>
+                <a:ea typeface="Calibri" panose="020F0502020204030204" pitchFamily="34" charset="0"/>
+                <a:cs typeface="Calibri" panose="020F0502020204030204" pitchFamily="34" charset="0"/>
+                <a:sym typeface="Inter"/>
+              </a:rPr>
+              <a:t>пользовательских</a:t>
+            </a:r>
+            <a:r>
+              <a:rPr lang="en-US" sz="1600" b="0" i="0" u="none" strike="noStrike" cap="none" dirty="0">
+                <a:solidFill>
+                  <a:srgbClr val="94A3B8"/>
+                </a:solidFill>
+                <a:latin typeface="Calibri" panose="020F0502020204030204" pitchFamily="34" charset="0"/>
+                <a:ea typeface="Calibri" panose="020F0502020204030204" pitchFamily="34" charset="0"/>
+                <a:cs typeface="Calibri" panose="020F0502020204030204" pitchFamily="34" charset="0"/>
+                <a:sym typeface="Inter"/>
+              </a:rPr>
+              <a:t> </a:t>
+            </a:r>
+            <a:r>
+              <a:rPr lang="en-US" sz="1600" b="0" i="0" u="none" strike="noStrike" cap="none" dirty="0" err="1">
+                <a:solidFill>
+                  <a:srgbClr val="94A3B8"/>
+                </a:solidFill>
+                <a:latin typeface="Calibri" panose="020F0502020204030204" pitchFamily="34" charset="0"/>
+                <a:ea typeface="Calibri" panose="020F0502020204030204" pitchFamily="34" charset="0"/>
+                <a:cs typeface="Calibri" panose="020F0502020204030204" pitchFamily="34" charset="0"/>
+                <a:sym typeface="Inter"/>
+              </a:rPr>
+              <a:t>правил</a:t>
+            </a:r>
+            <a:r>
+              <a:rPr lang="en-US" sz="1600" b="0" i="0" u="none" strike="noStrike" cap="none" dirty="0">
+                <a:solidFill>
+                  <a:srgbClr val="94A3B8"/>
+                </a:solidFill>
+                <a:latin typeface="Calibri" panose="020F0502020204030204" pitchFamily="34" charset="0"/>
+                <a:ea typeface="Calibri" panose="020F0502020204030204" pitchFamily="34" charset="0"/>
+                <a:cs typeface="Calibri" panose="020F0502020204030204" pitchFamily="34" charset="0"/>
+                <a:sym typeface="Inter"/>
+              </a:rPr>
+              <a:t> </a:t>
+            </a:r>
+            <a:r>
+              <a:rPr lang="en-US" sz="1600" b="0" i="0" u="none" strike="noStrike" cap="none" dirty="0" err="1">
+                <a:solidFill>
+                  <a:srgbClr val="94A3B8"/>
+                </a:solidFill>
+                <a:latin typeface="Calibri" panose="020F0502020204030204" pitchFamily="34" charset="0"/>
+                <a:ea typeface="Calibri" panose="020F0502020204030204" pitchFamily="34" charset="0"/>
+                <a:cs typeface="Calibri" panose="020F0502020204030204" pitchFamily="34" charset="0"/>
+                <a:sym typeface="Inter"/>
+              </a:rPr>
+              <a:t>без</a:t>
+            </a:r>
+            <a:r>
+              <a:rPr lang="en-US" sz="1600" b="0" i="0" u="none" strike="noStrike" cap="none" dirty="0">
+                <a:solidFill>
+                  <a:srgbClr val="94A3B8"/>
+                </a:solidFill>
+                <a:latin typeface="Calibri" panose="020F0502020204030204" pitchFamily="34" charset="0"/>
+                <a:ea typeface="Calibri" panose="020F0502020204030204" pitchFamily="34" charset="0"/>
+                <a:cs typeface="Calibri" panose="020F0502020204030204" pitchFamily="34" charset="0"/>
+                <a:sym typeface="Inter"/>
+              </a:rPr>
+              <a:t> </a:t>
+            </a:r>
+            <a:r>
+              <a:rPr lang="en-US" sz="1600" b="0" i="0" u="none" strike="noStrike" cap="none" dirty="0" err="1">
+                <a:solidFill>
+                  <a:srgbClr val="94A3B8"/>
+                </a:solidFill>
+                <a:latin typeface="Calibri" panose="020F0502020204030204" pitchFamily="34" charset="0"/>
+                <a:ea typeface="Calibri" panose="020F0502020204030204" pitchFamily="34" charset="0"/>
+                <a:cs typeface="Calibri" panose="020F0502020204030204" pitchFamily="34" charset="0"/>
+                <a:sym typeface="Inter"/>
+              </a:rPr>
+              <a:t>вмешательства</a:t>
+            </a:r>
+            <a:r>
+              <a:rPr lang="en-US" sz="1600" b="0" i="0" u="none" strike="noStrike" cap="none" dirty="0">
+                <a:solidFill>
+                  <a:srgbClr val="94A3B8"/>
+                </a:solidFill>
+                <a:latin typeface="Calibri" panose="020F0502020204030204" pitchFamily="34" charset="0"/>
+                <a:ea typeface="Calibri" panose="020F0502020204030204" pitchFamily="34" charset="0"/>
+                <a:cs typeface="Calibri" panose="020F0502020204030204" pitchFamily="34" charset="0"/>
+                <a:sym typeface="Inter"/>
+              </a:rPr>
+              <a:t> в </a:t>
+            </a:r>
+            <a:r>
+              <a:rPr lang="en-US" sz="1600" b="0" i="0" u="none" strike="noStrike" cap="none" dirty="0" err="1">
+                <a:solidFill>
+                  <a:srgbClr val="94A3B8"/>
+                </a:solidFill>
+                <a:latin typeface="Calibri" panose="020F0502020204030204" pitchFamily="34" charset="0"/>
+                <a:ea typeface="Calibri" panose="020F0502020204030204" pitchFamily="34" charset="0"/>
+                <a:cs typeface="Calibri" panose="020F0502020204030204" pitchFamily="34" charset="0"/>
+                <a:sym typeface="Inter"/>
+              </a:rPr>
+              <a:t>код</a:t>
+            </a:r>
+            <a:r>
+              <a:rPr lang="en-US" sz="1600" b="0" i="0" u="none" strike="noStrike" cap="none" dirty="0">
+                <a:solidFill>
+                  <a:srgbClr val="94A3B8"/>
+                </a:solidFill>
+                <a:latin typeface="Calibri" panose="020F0502020204030204" pitchFamily="34" charset="0"/>
+                <a:ea typeface="Calibri" panose="020F0502020204030204" pitchFamily="34" charset="0"/>
+                <a:cs typeface="Calibri" panose="020F0502020204030204" pitchFamily="34" charset="0"/>
+                <a:sym typeface="Inter"/>
+              </a:rPr>
+              <a:t>.</a:t>
+            </a:r>
+            <a:endParaRPr sz="1600" dirty="0">
+              <a:latin typeface="Calibri" panose="020F0502020204030204" pitchFamily="34" charset="0"/>
+              <a:ea typeface="Calibri" panose="020F0502020204030204" pitchFamily="34" charset="0"/>
+              <a:cs typeface="Calibri" panose="020F0502020204030204" pitchFamily="34" charset="0"/>
+            </a:endParaRPr>
+          </a:p>
+        </p:txBody>
+      </p:sp>
+      <p:sp>
+        <p:nvSpPr>
+          <p:cNvPr id="188" name="Google Shape;188;p20"/>
+          <p:cNvSpPr txBox="1"/>
+          <p:nvPr/>
+        </p:nvSpPr>
+        <p:spPr>
+          <a:xfrm>
+            <a:off x="3493907" y="2330053"/>
+            <a:ext cx="2368264" cy="369332"/>
+          </a:xfrm>
+          <a:prstGeom prst="rect">
+            <a:avLst/>
+          </a:prstGeom>
+          <a:noFill/>
+          <a:ln>
+            <a:noFill/>
+          </a:ln>
+        </p:spPr>
+        <p:txBody>
+          <a:bodyPr spcFirstLastPara="1" wrap="square" lIns="0" tIns="0" rIns="0" bIns="0" anchor="t" anchorCtr="0">
+            <a:spAutoFit/>
+          </a:bodyPr>
+          <a:lstStyle/>
+          <a:p>
+            <a:pPr marL="0" marR="0" lvl="0" indent="0" algn="ctr" rtl="0">
+              <a:spcBef>
+                <a:spcPts val="0"/>
+              </a:spcBef>
+              <a:spcAft>
+                <a:spcPts val="0"/>
+              </a:spcAft>
+              <a:buNone/>
+            </a:pPr>
+            <a:r>
+              <a:rPr lang="en-US" sz="2400" b="0" i="0" u="none" strike="noStrike" cap="none" dirty="0">
+                <a:solidFill>
+                  <a:srgbClr val="F8FAFC"/>
+                </a:solidFill>
+                <a:latin typeface="Calibri" panose="020F0502020204030204" pitchFamily="34" charset="0"/>
+                <a:ea typeface="Calibri" panose="020F0502020204030204" pitchFamily="34" charset="0"/>
+                <a:cs typeface="Calibri" panose="020F0502020204030204" pitchFamily="34" charset="0"/>
+                <a:sym typeface="Poppins SemiBold"/>
+              </a:rPr>
+              <a:t>System Tray</a:t>
+            </a:r>
+            <a:endParaRPr sz="2400" dirty="0">
+              <a:latin typeface="Calibri" panose="020F0502020204030204" pitchFamily="34" charset="0"/>
+              <a:ea typeface="Calibri" panose="020F0502020204030204" pitchFamily="34" charset="0"/>
+              <a:cs typeface="Calibri" panose="020F0502020204030204" pitchFamily="34" charset="0"/>
+            </a:endParaRPr>
+          </a:p>
+        </p:txBody>
+      </p:sp>
+      <p:sp>
+        <p:nvSpPr>
+          <p:cNvPr id="189" name="Google Shape;189;p20"/>
+          <p:cNvSpPr txBox="1"/>
+          <p:nvPr/>
+        </p:nvSpPr>
+        <p:spPr>
+          <a:xfrm>
+            <a:off x="3550294" y="2739628"/>
+            <a:ext cx="2255490" cy="1231106"/>
+          </a:xfrm>
+          <a:prstGeom prst="rect">
+            <a:avLst/>
+          </a:prstGeom>
+          <a:noFill/>
+          <a:ln>
+            <a:noFill/>
+          </a:ln>
+        </p:spPr>
+        <p:txBody>
+          <a:bodyPr spcFirstLastPara="1" wrap="square" lIns="0" tIns="0" rIns="0" bIns="0" anchor="t" anchorCtr="0">
+            <a:spAutoFit/>
+          </a:bodyPr>
+          <a:lstStyle/>
+          <a:p>
+            <a:pPr marL="0" marR="0" lvl="0" indent="0" algn="ctr" rtl="0">
+              <a:spcBef>
+                <a:spcPts val="0"/>
+              </a:spcBef>
+              <a:spcAft>
+                <a:spcPts val="0"/>
+              </a:spcAft>
+              <a:buNone/>
+            </a:pPr>
+            <a:r>
+              <a:rPr lang="en-US" sz="1600" b="0" i="0" u="none" strike="noStrike" cap="none" dirty="0" err="1">
+                <a:solidFill>
+                  <a:srgbClr val="94A3B8"/>
+                </a:solidFill>
+                <a:latin typeface="Calibri" panose="020F0502020204030204" pitchFamily="34" charset="0"/>
+                <a:ea typeface="Calibri" panose="020F0502020204030204" pitchFamily="34" charset="0"/>
+                <a:cs typeface="Calibri" panose="020F0502020204030204" pitchFamily="34" charset="0"/>
+                <a:sym typeface="Inter"/>
+              </a:rPr>
+              <a:t>Создание</a:t>
+            </a:r>
+            <a:r>
+              <a:rPr lang="en-US" sz="1600" b="0" i="0" u="none" strike="noStrike" cap="none" dirty="0">
+                <a:solidFill>
+                  <a:srgbClr val="94A3B8"/>
+                </a:solidFill>
+                <a:latin typeface="Calibri" panose="020F0502020204030204" pitchFamily="34" charset="0"/>
+                <a:ea typeface="Calibri" panose="020F0502020204030204" pitchFamily="34" charset="0"/>
+                <a:cs typeface="Calibri" panose="020F0502020204030204" pitchFamily="34" charset="0"/>
+                <a:sym typeface="Inter"/>
+              </a:rPr>
+              <a:t> </a:t>
+            </a:r>
+            <a:r>
+              <a:rPr lang="en-US" sz="1600" b="0" i="0" u="none" strike="noStrike" cap="none" dirty="0" err="1">
+                <a:solidFill>
+                  <a:srgbClr val="94A3B8"/>
+                </a:solidFill>
+                <a:latin typeface="Calibri" panose="020F0502020204030204" pitchFamily="34" charset="0"/>
+                <a:ea typeface="Calibri" panose="020F0502020204030204" pitchFamily="34" charset="0"/>
+                <a:cs typeface="Calibri" panose="020F0502020204030204" pitchFamily="34" charset="0"/>
+                <a:sym typeface="Inter"/>
+              </a:rPr>
+              <a:t>фонового</a:t>
+            </a:r>
+            <a:r>
+              <a:rPr lang="en-US" sz="1600" b="0" i="0" u="none" strike="noStrike" cap="none" dirty="0">
+                <a:solidFill>
+                  <a:srgbClr val="94A3B8"/>
+                </a:solidFill>
+                <a:latin typeface="Calibri" panose="020F0502020204030204" pitchFamily="34" charset="0"/>
+                <a:ea typeface="Calibri" panose="020F0502020204030204" pitchFamily="34" charset="0"/>
+                <a:cs typeface="Calibri" panose="020F0502020204030204" pitchFamily="34" charset="0"/>
+                <a:sym typeface="Inter"/>
+              </a:rPr>
+              <a:t> </a:t>
+            </a:r>
+            <a:r>
+              <a:rPr lang="en-US" sz="1600" b="0" i="0" u="none" strike="noStrike" cap="none" dirty="0" err="1">
+                <a:solidFill>
+                  <a:srgbClr val="94A3B8"/>
+                </a:solidFill>
+                <a:latin typeface="Calibri" panose="020F0502020204030204" pitchFamily="34" charset="0"/>
+                <a:ea typeface="Calibri" panose="020F0502020204030204" pitchFamily="34" charset="0"/>
+                <a:cs typeface="Calibri" panose="020F0502020204030204" pitchFamily="34" charset="0"/>
+                <a:sym typeface="Inter"/>
+              </a:rPr>
+              <a:t>процесса</a:t>
+            </a:r>
+            <a:r>
+              <a:rPr lang="en-US" sz="1600" b="0" i="0" u="none" strike="noStrike" cap="none" dirty="0">
+                <a:solidFill>
+                  <a:srgbClr val="94A3B8"/>
+                </a:solidFill>
+                <a:latin typeface="Calibri" panose="020F0502020204030204" pitchFamily="34" charset="0"/>
+                <a:ea typeface="Calibri" panose="020F0502020204030204" pitchFamily="34" charset="0"/>
+                <a:cs typeface="Calibri" panose="020F0502020204030204" pitchFamily="34" charset="0"/>
+                <a:sym typeface="Inter"/>
+              </a:rPr>
+              <a:t> с </a:t>
+            </a:r>
+            <a:r>
+              <a:rPr lang="en-US" sz="1600" b="0" i="0" u="none" strike="noStrike" cap="none" dirty="0" err="1">
+                <a:solidFill>
+                  <a:srgbClr val="94A3B8"/>
+                </a:solidFill>
+                <a:latin typeface="Calibri" panose="020F0502020204030204" pitchFamily="34" charset="0"/>
+                <a:ea typeface="Calibri" panose="020F0502020204030204" pitchFamily="34" charset="0"/>
+                <a:cs typeface="Calibri" panose="020F0502020204030204" pitchFamily="34" charset="0"/>
+                <a:sym typeface="Inter"/>
+              </a:rPr>
+              <a:t>иконкой</a:t>
+            </a:r>
+            <a:r>
+              <a:rPr lang="en-US" sz="1600" b="0" i="0" u="none" strike="noStrike" cap="none" dirty="0">
+                <a:solidFill>
+                  <a:srgbClr val="94A3B8"/>
+                </a:solidFill>
+                <a:latin typeface="Calibri" panose="020F0502020204030204" pitchFamily="34" charset="0"/>
+                <a:ea typeface="Calibri" panose="020F0502020204030204" pitchFamily="34" charset="0"/>
+                <a:cs typeface="Calibri" panose="020F0502020204030204" pitchFamily="34" charset="0"/>
+                <a:sym typeface="Inter"/>
+              </a:rPr>
+              <a:t> </a:t>
+            </a:r>
+            <a:r>
+              <a:rPr lang="en-US" sz="1600" b="0" i="0" u="none" strike="noStrike" cap="none" dirty="0" err="1">
+                <a:solidFill>
+                  <a:srgbClr val="94A3B8"/>
+                </a:solidFill>
+                <a:latin typeface="Calibri" panose="020F0502020204030204" pitchFamily="34" charset="0"/>
+                <a:ea typeface="Calibri" panose="020F0502020204030204" pitchFamily="34" charset="0"/>
+                <a:cs typeface="Calibri" panose="020F0502020204030204" pitchFamily="34" charset="0"/>
+                <a:sym typeface="Inter"/>
+              </a:rPr>
+              <a:t>для</a:t>
+            </a:r>
+            <a:r>
+              <a:rPr lang="en-US" sz="1600" b="0" i="0" u="none" strike="noStrike" cap="none" dirty="0">
+                <a:solidFill>
+                  <a:srgbClr val="94A3B8"/>
+                </a:solidFill>
+                <a:latin typeface="Calibri" panose="020F0502020204030204" pitchFamily="34" charset="0"/>
+                <a:ea typeface="Calibri" panose="020F0502020204030204" pitchFamily="34" charset="0"/>
+                <a:cs typeface="Calibri" panose="020F0502020204030204" pitchFamily="34" charset="0"/>
+                <a:sym typeface="Inter"/>
+              </a:rPr>
+              <a:t> </a:t>
+            </a:r>
+            <a:r>
+              <a:rPr lang="en-US" sz="1600" b="0" i="0" u="none" strike="noStrike" cap="none" dirty="0" err="1">
+                <a:solidFill>
+                  <a:srgbClr val="94A3B8"/>
+                </a:solidFill>
+                <a:latin typeface="Calibri" panose="020F0502020204030204" pitchFamily="34" charset="0"/>
+                <a:ea typeface="Calibri" panose="020F0502020204030204" pitchFamily="34" charset="0"/>
+                <a:cs typeface="Calibri" panose="020F0502020204030204" pitchFamily="34" charset="0"/>
+                <a:sym typeface="Inter"/>
+              </a:rPr>
+              <a:t>незаметного</a:t>
+            </a:r>
+            <a:r>
+              <a:rPr lang="en-US" sz="1600" b="0" i="0" u="none" strike="noStrike" cap="none" dirty="0">
+                <a:solidFill>
+                  <a:srgbClr val="94A3B8"/>
+                </a:solidFill>
+                <a:latin typeface="Calibri" panose="020F0502020204030204" pitchFamily="34" charset="0"/>
+                <a:ea typeface="Calibri" panose="020F0502020204030204" pitchFamily="34" charset="0"/>
+                <a:cs typeface="Calibri" panose="020F0502020204030204" pitchFamily="34" charset="0"/>
+                <a:sym typeface="Inter"/>
+              </a:rPr>
+              <a:t> </a:t>
+            </a:r>
+            <a:r>
+              <a:rPr lang="en-US" sz="1600" b="0" i="0" u="none" strike="noStrike" cap="none" dirty="0" err="1">
+                <a:solidFill>
+                  <a:srgbClr val="94A3B8"/>
+                </a:solidFill>
+                <a:latin typeface="Calibri" panose="020F0502020204030204" pitchFamily="34" charset="0"/>
+                <a:ea typeface="Calibri" panose="020F0502020204030204" pitchFamily="34" charset="0"/>
+                <a:cs typeface="Calibri" panose="020F0502020204030204" pitchFamily="34" charset="0"/>
+                <a:sym typeface="Inter"/>
+              </a:rPr>
+              <a:t>авто-управления</a:t>
+            </a:r>
+            <a:r>
+              <a:rPr lang="en-US" sz="1600" b="0" i="0" u="none" strike="noStrike" cap="none" dirty="0">
+                <a:solidFill>
+                  <a:srgbClr val="94A3B8"/>
+                </a:solidFill>
+                <a:latin typeface="Calibri" panose="020F0502020204030204" pitchFamily="34" charset="0"/>
+                <a:ea typeface="Calibri" panose="020F0502020204030204" pitchFamily="34" charset="0"/>
+                <a:cs typeface="Calibri" panose="020F0502020204030204" pitchFamily="34" charset="0"/>
+                <a:sym typeface="Inter"/>
+              </a:rPr>
+              <a:t> </a:t>
+            </a:r>
+            <a:r>
+              <a:rPr lang="en-US" sz="1600" b="0" i="0" u="none" strike="noStrike" cap="none" dirty="0" err="1">
+                <a:solidFill>
+                  <a:srgbClr val="94A3B8"/>
+                </a:solidFill>
+                <a:latin typeface="Calibri" panose="020F0502020204030204" pitchFamily="34" charset="0"/>
+                <a:ea typeface="Calibri" panose="020F0502020204030204" pitchFamily="34" charset="0"/>
+                <a:cs typeface="Calibri" panose="020F0502020204030204" pitchFamily="34" charset="0"/>
+                <a:sym typeface="Inter"/>
+              </a:rPr>
+              <a:t>директориями</a:t>
+            </a:r>
+            <a:r>
+              <a:rPr lang="en-US" sz="1600" b="0" i="0" u="none" strike="noStrike" cap="none" dirty="0">
+                <a:solidFill>
+                  <a:srgbClr val="94A3B8"/>
+                </a:solidFill>
+                <a:latin typeface="Calibri" panose="020F0502020204030204" pitchFamily="34" charset="0"/>
+                <a:ea typeface="Calibri" panose="020F0502020204030204" pitchFamily="34" charset="0"/>
+                <a:cs typeface="Calibri" panose="020F0502020204030204" pitchFamily="34" charset="0"/>
+                <a:sym typeface="Inter"/>
+              </a:rPr>
+              <a:t>.</a:t>
+            </a:r>
+            <a:endParaRPr sz="1600" dirty="0">
+              <a:latin typeface="Calibri" panose="020F0502020204030204" pitchFamily="34" charset="0"/>
+              <a:ea typeface="Calibri" panose="020F0502020204030204" pitchFamily="34" charset="0"/>
+              <a:cs typeface="Calibri" panose="020F0502020204030204" pitchFamily="34" charset="0"/>
+            </a:endParaRPr>
+          </a:p>
+        </p:txBody>
+      </p:sp>
+      <p:sp>
+        <p:nvSpPr>
+          <p:cNvPr id="190" name="Google Shape;190;p20"/>
+          <p:cNvSpPr txBox="1"/>
+          <p:nvPr/>
+        </p:nvSpPr>
+        <p:spPr>
+          <a:xfrm>
+            <a:off x="6329827" y="4524375"/>
+            <a:ext cx="2368264" cy="369332"/>
+          </a:xfrm>
+          <a:prstGeom prst="rect">
+            <a:avLst/>
+          </a:prstGeom>
+          <a:noFill/>
+          <a:ln>
+            <a:noFill/>
+          </a:ln>
+        </p:spPr>
+        <p:txBody>
+          <a:bodyPr spcFirstLastPara="1" wrap="square" lIns="0" tIns="0" rIns="0" bIns="0" anchor="t" anchorCtr="0">
+            <a:spAutoFit/>
+          </a:bodyPr>
+          <a:lstStyle/>
+          <a:p>
+            <a:pPr marL="0" marR="0" lvl="0" indent="0" algn="ctr" rtl="0">
+              <a:spcBef>
+                <a:spcPts val="0"/>
+              </a:spcBef>
+              <a:spcAft>
+                <a:spcPts val="0"/>
+              </a:spcAft>
+              <a:buNone/>
+            </a:pPr>
+            <a:r>
+              <a:rPr lang="en-US" sz="2400" b="0" i="0" u="none" strike="noStrike" cap="none" dirty="0" err="1">
+                <a:solidFill>
+                  <a:srgbClr val="F8FAFC"/>
+                </a:solidFill>
+                <a:latin typeface="Calibri" panose="020F0502020204030204" pitchFamily="34" charset="0"/>
+                <a:ea typeface="Calibri" panose="020F0502020204030204" pitchFamily="34" charset="0"/>
+                <a:cs typeface="Calibri" panose="020F0502020204030204" pitchFamily="34" charset="0"/>
+                <a:sym typeface="Poppins SemiBold"/>
+              </a:rPr>
+              <a:t>Интеграция</a:t>
+            </a:r>
+            <a:r>
+              <a:rPr lang="en-US" sz="2400" b="0" i="0" u="none" strike="noStrike" cap="none" dirty="0">
+                <a:solidFill>
+                  <a:srgbClr val="F8FAFC"/>
+                </a:solidFill>
+                <a:latin typeface="Calibri" panose="020F0502020204030204" pitchFamily="34" charset="0"/>
+                <a:ea typeface="Calibri" panose="020F0502020204030204" pitchFamily="34" charset="0"/>
+                <a:cs typeface="Calibri" panose="020F0502020204030204" pitchFamily="34" charset="0"/>
+                <a:sym typeface="Poppins SemiBold"/>
+              </a:rPr>
+              <a:t> LLM</a:t>
+            </a:r>
+            <a:endParaRPr sz="2400" dirty="0">
+              <a:latin typeface="Calibri" panose="020F0502020204030204" pitchFamily="34" charset="0"/>
+              <a:ea typeface="Calibri" panose="020F0502020204030204" pitchFamily="34" charset="0"/>
+              <a:cs typeface="Calibri" panose="020F0502020204030204" pitchFamily="34" charset="0"/>
+            </a:endParaRPr>
+          </a:p>
+        </p:txBody>
+      </p:sp>
+      <p:sp>
+        <p:nvSpPr>
+          <p:cNvPr id="191" name="Google Shape;191;p20"/>
+          <p:cNvSpPr txBox="1"/>
+          <p:nvPr/>
+        </p:nvSpPr>
+        <p:spPr>
+          <a:xfrm>
+            <a:off x="6386214" y="4933950"/>
+            <a:ext cx="2255490" cy="984885"/>
+          </a:xfrm>
+          <a:prstGeom prst="rect">
+            <a:avLst/>
+          </a:prstGeom>
+          <a:noFill/>
+          <a:ln>
+            <a:noFill/>
+          </a:ln>
+        </p:spPr>
+        <p:txBody>
+          <a:bodyPr spcFirstLastPara="1" wrap="square" lIns="0" tIns="0" rIns="0" bIns="0" anchor="t" anchorCtr="0">
+            <a:spAutoFit/>
+          </a:bodyPr>
+          <a:lstStyle/>
+          <a:p>
+            <a:pPr marL="0" marR="0" lvl="0" indent="0" algn="ctr" rtl="0">
+              <a:spcBef>
+                <a:spcPts val="0"/>
+              </a:spcBef>
+              <a:spcAft>
+                <a:spcPts val="0"/>
+              </a:spcAft>
+              <a:buNone/>
+            </a:pPr>
+            <a:r>
+              <a:rPr lang="en-US" sz="1600" b="0" i="0" u="none" strike="noStrike" cap="none" dirty="0" err="1">
+                <a:solidFill>
+                  <a:srgbClr val="94A3B8"/>
+                </a:solidFill>
+                <a:latin typeface="Calibri" panose="020F0502020204030204" pitchFamily="34" charset="0"/>
+                <a:ea typeface="Calibri" panose="020F0502020204030204" pitchFamily="34" charset="0"/>
+                <a:cs typeface="Calibri" panose="020F0502020204030204" pitchFamily="34" charset="0"/>
+                <a:sym typeface="Inter"/>
+              </a:rPr>
+              <a:t>Смысловая</a:t>
+            </a:r>
+            <a:r>
+              <a:rPr lang="en-US" sz="1600" b="0" i="0" u="none" strike="noStrike" cap="none" dirty="0">
+                <a:solidFill>
+                  <a:srgbClr val="94A3B8"/>
+                </a:solidFill>
+                <a:latin typeface="Calibri" panose="020F0502020204030204" pitchFamily="34" charset="0"/>
+                <a:ea typeface="Calibri" panose="020F0502020204030204" pitchFamily="34" charset="0"/>
+                <a:cs typeface="Calibri" panose="020F0502020204030204" pitchFamily="34" charset="0"/>
+                <a:sym typeface="Inter"/>
+              </a:rPr>
+              <a:t> </a:t>
+            </a:r>
+            <a:r>
+              <a:rPr lang="en-US" sz="1600" b="0" i="0" u="none" strike="noStrike" cap="none" dirty="0" err="1">
+                <a:solidFill>
+                  <a:srgbClr val="94A3B8"/>
+                </a:solidFill>
+                <a:latin typeface="Calibri" panose="020F0502020204030204" pitchFamily="34" charset="0"/>
+                <a:ea typeface="Calibri" panose="020F0502020204030204" pitchFamily="34" charset="0"/>
+                <a:cs typeface="Calibri" panose="020F0502020204030204" pitchFamily="34" charset="0"/>
+                <a:sym typeface="Inter"/>
+              </a:rPr>
+              <a:t>классификация</a:t>
+            </a:r>
+            <a:r>
+              <a:rPr lang="en-US" sz="1600" b="0" i="0" u="none" strike="noStrike" cap="none" dirty="0">
+                <a:solidFill>
+                  <a:srgbClr val="94A3B8"/>
+                </a:solidFill>
+                <a:latin typeface="Calibri" panose="020F0502020204030204" pitchFamily="34" charset="0"/>
+                <a:ea typeface="Calibri" panose="020F0502020204030204" pitchFamily="34" charset="0"/>
+                <a:cs typeface="Calibri" panose="020F0502020204030204" pitchFamily="34" charset="0"/>
+                <a:sym typeface="Inter"/>
+              </a:rPr>
+              <a:t> </a:t>
+            </a:r>
+            <a:r>
+              <a:rPr lang="en-US" sz="1600" b="0" i="0" u="none" strike="noStrike" cap="none" dirty="0" err="1">
+                <a:solidFill>
+                  <a:srgbClr val="94A3B8"/>
+                </a:solidFill>
+                <a:latin typeface="Calibri" panose="020F0502020204030204" pitchFamily="34" charset="0"/>
+                <a:ea typeface="Calibri" panose="020F0502020204030204" pitchFamily="34" charset="0"/>
+                <a:cs typeface="Calibri" panose="020F0502020204030204" pitchFamily="34" charset="0"/>
+                <a:sym typeface="Inter"/>
+              </a:rPr>
+              <a:t>документов</a:t>
+            </a:r>
+            <a:r>
+              <a:rPr lang="en-US" sz="1600" b="0" i="0" u="none" strike="noStrike" cap="none" dirty="0">
+                <a:solidFill>
+                  <a:srgbClr val="94A3B8"/>
+                </a:solidFill>
+                <a:latin typeface="Calibri" panose="020F0502020204030204" pitchFamily="34" charset="0"/>
+                <a:ea typeface="Calibri" panose="020F0502020204030204" pitchFamily="34" charset="0"/>
+                <a:cs typeface="Calibri" panose="020F0502020204030204" pitchFamily="34" charset="0"/>
+                <a:sym typeface="Inter"/>
+              </a:rPr>
+              <a:t> с </a:t>
+            </a:r>
+            <a:r>
+              <a:rPr lang="en-US" sz="1600" b="0" i="0" u="none" strike="noStrike" cap="none" dirty="0" err="1">
+                <a:solidFill>
+                  <a:srgbClr val="94A3B8"/>
+                </a:solidFill>
+                <a:latin typeface="Calibri" panose="020F0502020204030204" pitchFamily="34" charset="0"/>
+                <a:ea typeface="Calibri" panose="020F0502020204030204" pitchFamily="34" charset="0"/>
+                <a:cs typeface="Calibri" panose="020F0502020204030204" pitchFamily="34" charset="0"/>
+                <a:sym typeface="Inter"/>
+              </a:rPr>
+              <a:t>помощью</a:t>
+            </a:r>
+            <a:r>
+              <a:rPr lang="en-US" sz="1600" b="0" i="0" u="none" strike="noStrike" cap="none" dirty="0">
+                <a:solidFill>
+                  <a:srgbClr val="94A3B8"/>
+                </a:solidFill>
+                <a:latin typeface="Calibri" panose="020F0502020204030204" pitchFamily="34" charset="0"/>
+                <a:ea typeface="Calibri" panose="020F0502020204030204" pitchFamily="34" charset="0"/>
+                <a:cs typeface="Calibri" panose="020F0502020204030204" pitchFamily="34" charset="0"/>
+                <a:sym typeface="Inter"/>
+              </a:rPr>
+              <a:t> </a:t>
+            </a:r>
+            <a:r>
+              <a:rPr lang="en-US" sz="1600" b="0" i="0" u="none" strike="noStrike" cap="none" dirty="0" err="1">
+                <a:solidFill>
+                  <a:srgbClr val="94A3B8"/>
+                </a:solidFill>
+                <a:latin typeface="Calibri" panose="020F0502020204030204" pitchFamily="34" charset="0"/>
+                <a:ea typeface="Calibri" panose="020F0502020204030204" pitchFamily="34" charset="0"/>
+                <a:cs typeface="Calibri" panose="020F0502020204030204" pitchFamily="34" charset="0"/>
+                <a:sym typeface="Inter"/>
+              </a:rPr>
+              <a:t>нейросетей</a:t>
+            </a:r>
+            <a:r>
+              <a:rPr lang="en-US" sz="1600" b="0" i="0" u="none" strike="noStrike" cap="none" dirty="0">
+                <a:solidFill>
+                  <a:srgbClr val="94A3B8"/>
+                </a:solidFill>
+                <a:latin typeface="Calibri" panose="020F0502020204030204" pitchFamily="34" charset="0"/>
+                <a:ea typeface="Calibri" panose="020F0502020204030204" pitchFamily="34" charset="0"/>
+                <a:cs typeface="Calibri" panose="020F0502020204030204" pitchFamily="34" charset="0"/>
+                <a:sym typeface="Inter"/>
+              </a:rPr>
+              <a:t>.</a:t>
+            </a:r>
+            <a:endParaRPr sz="1600" dirty="0">
+              <a:latin typeface="Calibri" panose="020F0502020204030204" pitchFamily="34" charset="0"/>
+              <a:ea typeface="Calibri" panose="020F0502020204030204" pitchFamily="34" charset="0"/>
+              <a:cs typeface="Calibri" panose="020F0502020204030204" pitchFamily="34" charset="0"/>
+            </a:endParaRPr>
+          </a:p>
+        </p:txBody>
+      </p:sp>
+      <p:sp>
+        <p:nvSpPr>
+          <p:cNvPr id="192" name="Google Shape;192;p20"/>
+          <p:cNvSpPr txBox="1"/>
+          <p:nvPr/>
+        </p:nvSpPr>
+        <p:spPr>
+          <a:xfrm>
+            <a:off x="9165747" y="2330053"/>
+            <a:ext cx="2368264" cy="369332"/>
+          </a:xfrm>
+          <a:prstGeom prst="rect">
+            <a:avLst/>
+          </a:prstGeom>
+          <a:noFill/>
+          <a:ln>
+            <a:noFill/>
+          </a:ln>
+        </p:spPr>
+        <p:txBody>
+          <a:bodyPr spcFirstLastPara="1" wrap="square" lIns="0" tIns="0" rIns="0" bIns="0" anchor="t" anchorCtr="0">
+            <a:spAutoFit/>
+          </a:bodyPr>
+          <a:lstStyle/>
+          <a:p>
+            <a:pPr marL="0" marR="0" lvl="0" indent="0" algn="ctr" rtl="0">
+              <a:spcBef>
+                <a:spcPts val="0"/>
+              </a:spcBef>
+              <a:spcAft>
+                <a:spcPts val="0"/>
+              </a:spcAft>
+              <a:buNone/>
+            </a:pPr>
+            <a:r>
+              <a:rPr lang="en-US" sz="2400" b="0" i="0" u="none" strike="noStrike" cap="none" dirty="0" err="1">
+                <a:solidFill>
+                  <a:srgbClr val="F8FAFC"/>
+                </a:solidFill>
+                <a:latin typeface="Calibri" panose="020F0502020204030204" pitchFamily="34" charset="0"/>
+                <a:ea typeface="Calibri" panose="020F0502020204030204" pitchFamily="34" charset="0"/>
+                <a:cs typeface="Calibri" panose="020F0502020204030204" pitchFamily="34" charset="0"/>
+                <a:sym typeface="Poppins SemiBold"/>
+              </a:rPr>
+              <a:t>Дедупликация</a:t>
+            </a:r>
+            <a:endParaRPr sz="2400" dirty="0">
+              <a:latin typeface="Calibri" panose="020F0502020204030204" pitchFamily="34" charset="0"/>
+              <a:ea typeface="Calibri" panose="020F0502020204030204" pitchFamily="34" charset="0"/>
+              <a:cs typeface="Calibri" panose="020F0502020204030204" pitchFamily="34" charset="0"/>
+            </a:endParaRPr>
+          </a:p>
+        </p:txBody>
+      </p:sp>
+      <p:sp>
+        <p:nvSpPr>
+          <p:cNvPr id="193" name="Google Shape;193;p20"/>
+          <p:cNvSpPr txBox="1"/>
+          <p:nvPr/>
+        </p:nvSpPr>
+        <p:spPr>
+          <a:xfrm>
+            <a:off x="9222134" y="2739628"/>
+            <a:ext cx="2255490" cy="1231106"/>
+          </a:xfrm>
+          <a:prstGeom prst="rect">
+            <a:avLst/>
+          </a:prstGeom>
+          <a:noFill/>
+          <a:ln>
+            <a:noFill/>
+          </a:ln>
+        </p:spPr>
+        <p:txBody>
+          <a:bodyPr spcFirstLastPara="1" wrap="square" lIns="0" tIns="0" rIns="0" bIns="0" anchor="t" anchorCtr="0">
+            <a:spAutoFit/>
+          </a:bodyPr>
+          <a:lstStyle/>
+          <a:p>
+            <a:pPr marL="0" marR="0" lvl="0" indent="0" algn="ctr" rtl="0">
+              <a:spcBef>
+                <a:spcPts val="0"/>
+              </a:spcBef>
+              <a:spcAft>
+                <a:spcPts val="0"/>
+              </a:spcAft>
+              <a:buNone/>
+            </a:pPr>
+            <a:r>
+              <a:rPr lang="en-US" sz="1600" b="0" i="0" u="none" strike="noStrike" cap="none" dirty="0" err="1">
+                <a:solidFill>
+                  <a:srgbClr val="94A3B8"/>
+                </a:solidFill>
+                <a:latin typeface="Calibri" panose="020F0502020204030204" pitchFamily="34" charset="0"/>
+                <a:ea typeface="Calibri" panose="020F0502020204030204" pitchFamily="34" charset="0"/>
+                <a:cs typeface="Calibri" panose="020F0502020204030204" pitchFamily="34" charset="0"/>
+                <a:sym typeface="Inter"/>
+              </a:rPr>
+              <a:t>Внедрение</a:t>
+            </a:r>
+            <a:r>
+              <a:rPr lang="en-US" sz="1600" b="0" i="0" u="none" strike="noStrike" cap="none" dirty="0">
+                <a:solidFill>
+                  <a:srgbClr val="94A3B8"/>
+                </a:solidFill>
+                <a:latin typeface="Calibri" panose="020F0502020204030204" pitchFamily="34" charset="0"/>
+                <a:ea typeface="Calibri" panose="020F0502020204030204" pitchFamily="34" charset="0"/>
+                <a:cs typeface="Calibri" panose="020F0502020204030204" pitchFamily="34" charset="0"/>
+                <a:sym typeface="Inter"/>
+              </a:rPr>
+              <a:t> </a:t>
+            </a:r>
+            <a:r>
+              <a:rPr lang="en-US" sz="1600" b="0" i="0" u="none" strike="noStrike" cap="none" dirty="0" err="1">
+                <a:solidFill>
+                  <a:srgbClr val="94A3B8"/>
+                </a:solidFill>
+                <a:latin typeface="Calibri" panose="020F0502020204030204" pitchFamily="34" charset="0"/>
+                <a:ea typeface="Calibri" panose="020F0502020204030204" pitchFamily="34" charset="0"/>
+                <a:cs typeface="Calibri" panose="020F0502020204030204" pitchFamily="34" charset="0"/>
+                <a:sym typeface="Inter"/>
+              </a:rPr>
+              <a:t>алгоритмов</a:t>
+            </a:r>
+            <a:r>
+              <a:rPr lang="en-US" sz="1600" b="0" i="0" u="none" strike="noStrike" cap="none" dirty="0">
+                <a:solidFill>
+                  <a:srgbClr val="94A3B8"/>
+                </a:solidFill>
+                <a:latin typeface="Calibri" panose="020F0502020204030204" pitchFamily="34" charset="0"/>
+                <a:ea typeface="Calibri" panose="020F0502020204030204" pitchFamily="34" charset="0"/>
+                <a:cs typeface="Calibri" panose="020F0502020204030204" pitchFamily="34" charset="0"/>
+                <a:sym typeface="Inter"/>
+              </a:rPr>
+              <a:t> </a:t>
+            </a:r>
+            <a:r>
+              <a:rPr lang="en-US" sz="1600" b="0" i="0" u="none" strike="noStrike" cap="none" dirty="0" err="1">
+                <a:solidFill>
+                  <a:srgbClr val="94A3B8"/>
+                </a:solidFill>
+                <a:latin typeface="Calibri" panose="020F0502020204030204" pitchFamily="34" charset="0"/>
+                <a:ea typeface="Calibri" panose="020F0502020204030204" pitchFamily="34" charset="0"/>
+                <a:cs typeface="Calibri" panose="020F0502020204030204" pitchFamily="34" charset="0"/>
+                <a:sym typeface="Inter"/>
+              </a:rPr>
+              <a:t>хэширования</a:t>
+            </a:r>
+            <a:r>
+              <a:rPr lang="en-US" sz="1600" b="0" i="0" u="none" strike="noStrike" cap="none" dirty="0">
+                <a:solidFill>
+                  <a:srgbClr val="94A3B8"/>
+                </a:solidFill>
+                <a:latin typeface="Calibri" panose="020F0502020204030204" pitchFamily="34" charset="0"/>
+                <a:ea typeface="Calibri" panose="020F0502020204030204" pitchFamily="34" charset="0"/>
+                <a:cs typeface="Calibri" panose="020F0502020204030204" pitchFamily="34" charset="0"/>
+                <a:sym typeface="Inter"/>
+              </a:rPr>
+              <a:t> (MD5/SHA-256) </a:t>
+            </a:r>
+            <a:r>
+              <a:rPr lang="en-US" sz="1600" b="0" i="0" u="none" strike="noStrike" cap="none" dirty="0" err="1">
+                <a:solidFill>
+                  <a:srgbClr val="94A3B8"/>
+                </a:solidFill>
+                <a:latin typeface="Calibri" panose="020F0502020204030204" pitchFamily="34" charset="0"/>
+                <a:ea typeface="Calibri" panose="020F0502020204030204" pitchFamily="34" charset="0"/>
+                <a:cs typeface="Calibri" panose="020F0502020204030204" pitchFamily="34" charset="0"/>
+                <a:sym typeface="Inter"/>
+              </a:rPr>
+              <a:t>для</a:t>
+            </a:r>
+            <a:r>
+              <a:rPr lang="en-US" sz="1600" b="0" i="0" u="none" strike="noStrike" cap="none" dirty="0">
+                <a:solidFill>
+                  <a:srgbClr val="94A3B8"/>
+                </a:solidFill>
+                <a:latin typeface="Calibri" panose="020F0502020204030204" pitchFamily="34" charset="0"/>
+                <a:ea typeface="Calibri" panose="020F0502020204030204" pitchFamily="34" charset="0"/>
+                <a:cs typeface="Calibri" panose="020F0502020204030204" pitchFamily="34" charset="0"/>
+                <a:sym typeface="Inter"/>
+              </a:rPr>
+              <a:t> </a:t>
+            </a:r>
+            <a:r>
+              <a:rPr lang="en-US" sz="1600" b="0" i="0" u="none" strike="noStrike" cap="none" dirty="0" err="1">
+                <a:solidFill>
+                  <a:srgbClr val="94A3B8"/>
+                </a:solidFill>
+                <a:latin typeface="Calibri" panose="020F0502020204030204" pitchFamily="34" charset="0"/>
+                <a:ea typeface="Calibri" panose="020F0502020204030204" pitchFamily="34" charset="0"/>
+                <a:cs typeface="Calibri" panose="020F0502020204030204" pitchFamily="34" charset="0"/>
+                <a:sym typeface="Inter"/>
+              </a:rPr>
+              <a:t>поиска</a:t>
+            </a:r>
+            <a:r>
+              <a:rPr lang="en-US" sz="1600" b="0" i="0" u="none" strike="noStrike" cap="none" dirty="0">
+                <a:solidFill>
+                  <a:srgbClr val="94A3B8"/>
+                </a:solidFill>
+                <a:latin typeface="Calibri" panose="020F0502020204030204" pitchFamily="34" charset="0"/>
+                <a:ea typeface="Calibri" panose="020F0502020204030204" pitchFamily="34" charset="0"/>
+                <a:cs typeface="Calibri" panose="020F0502020204030204" pitchFamily="34" charset="0"/>
+                <a:sym typeface="Inter"/>
+              </a:rPr>
+              <a:t> и </a:t>
+            </a:r>
+            <a:r>
+              <a:rPr lang="en-US" sz="1600" b="0" i="0" u="none" strike="noStrike" cap="none" dirty="0" err="1">
+                <a:solidFill>
+                  <a:srgbClr val="94A3B8"/>
+                </a:solidFill>
+                <a:latin typeface="Calibri" panose="020F0502020204030204" pitchFamily="34" charset="0"/>
+                <a:ea typeface="Calibri" panose="020F0502020204030204" pitchFamily="34" charset="0"/>
+                <a:cs typeface="Calibri" panose="020F0502020204030204" pitchFamily="34" charset="0"/>
+                <a:sym typeface="Inter"/>
+              </a:rPr>
+              <a:t>зачистки</a:t>
+            </a:r>
+            <a:r>
+              <a:rPr lang="en-US" sz="1600" b="0" i="0" u="none" strike="noStrike" cap="none" dirty="0">
+                <a:solidFill>
+                  <a:srgbClr val="94A3B8"/>
+                </a:solidFill>
+                <a:latin typeface="Calibri" panose="020F0502020204030204" pitchFamily="34" charset="0"/>
+                <a:ea typeface="Calibri" panose="020F0502020204030204" pitchFamily="34" charset="0"/>
+                <a:cs typeface="Calibri" panose="020F0502020204030204" pitchFamily="34" charset="0"/>
+                <a:sym typeface="Inter"/>
+              </a:rPr>
+              <a:t> 100% </a:t>
+            </a:r>
+            <a:r>
+              <a:rPr lang="en-US" sz="1600" b="0" i="0" u="none" strike="noStrike" cap="none" dirty="0" err="1">
+                <a:solidFill>
+                  <a:srgbClr val="94A3B8"/>
+                </a:solidFill>
+                <a:latin typeface="Calibri" panose="020F0502020204030204" pitchFamily="34" charset="0"/>
+                <a:ea typeface="Calibri" panose="020F0502020204030204" pitchFamily="34" charset="0"/>
+                <a:cs typeface="Calibri" panose="020F0502020204030204" pitchFamily="34" charset="0"/>
+                <a:sym typeface="Inter"/>
+              </a:rPr>
+              <a:t>идентичных</a:t>
+            </a:r>
+            <a:r>
+              <a:rPr lang="en-US" sz="1600" b="0" i="0" u="none" strike="noStrike" cap="none" dirty="0">
+                <a:solidFill>
+                  <a:srgbClr val="94A3B8"/>
+                </a:solidFill>
+                <a:latin typeface="Calibri" panose="020F0502020204030204" pitchFamily="34" charset="0"/>
+                <a:ea typeface="Calibri" panose="020F0502020204030204" pitchFamily="34" charset="0"/>
+                <a:cs typeface="Calibri" panose="020F0502020204030204" pitchFamily="34" charset="0"/>
+                <a:sym typeface="Inter"/>
+              </a:rPr>
+              <a:t> </a:t>
+            </a:r>
+            <a:r>
+              <a:rPr lang="en-US" sz="1600" b="0" i="0" u="none" strike="noStrike" cap="none" dirty="0" err="1">
+                <a:solidFill>
+                  <a:srgbClr val="94A3B8"/>
+                </a:solidFill>
+                <a:latin typeface="Calibri" panose="020F0502020204030204" pitchFamily="34" charset="0"/>
+                <a:ea typeface="Calibri" panose="020F0502020204030204" pitchFamily="34" charset="0"/>
+                <a:cs typeface="Calibri" panose="020F0502020204030204" pitchFamily="34" charset="0"/>
+                <a:sym typeface="Inter"/>
+              </a:rPr>
+              <a:t>файлов</a:t>
+            </a:r>
+            <a:r>
+              <a:rPr lang="en-US" sz="1600" b="0" i="0" u="none" strike="noStrike" cap="none" dirty="0">
+                <a:solidFill>
+                  <a:srgbClr val="94A3B8"/>
+                </a:solidFill>
+                <a:latin typeface="Calibri" panose="020F0502020204030204" pitchFamily="34" charset="0"/>
+                <a:ea typeface="Calibri" panose="020F0502020204030204" pitchFamily="34" charset="0"/>
+                <a:cs typeface="Calibri" panose="020F0502020204030204" pitchFamily="34" charset="0"/>
+                <a:sym typeface="Inter"/>
+              </a:rPr>
+              <a:t>.</a:t>
+            </a:r>
+            <a:endParaRPr sz="1600" dirty="0">
+              <a:latin typeface="Calibri" panose="020F0502020204030204" pitchFamily="34" charset="0"/>
+              <a:ea typeface="Calibri" panose="020F0502020204030204" pitchFamily="34" charset="0"/>
+              <a:cs typeface="Calibri" panose="020F0502020204030204" pitchFamily="34" charset="0"/>
+            </a:endParaRPr>
+          </a:p>
+        </p:txBody>
+      </p:sp>
+      <p:sp>
+        <p:nvSpPr>
+          <p:cNvPr id="194" name="Google Shape;194;p20"/>
+          <p:cNvSpPr/>
+          <p:nvPr/>
+        </p:nvSpPr>
+        <p:spPr>
+          <a:xfrm>
+            <a:off x="1727820" y="4076700"/>
+            <a:ext cx="228600" cy="228600"/>
+          </a:xfrm>
+          <a:prstGeom prst="roundRect">
+            <a:avLst>
+              <a:gd name="adj" fmla="val 50000"/>
+            </a:avLst>
+          </a:prstGeom>
+          <a:solidFill>
+            <a:srgbClr val="0B1120"/>
+          </a:solidFill>
+          <a:ln w="38100" cap="flat" cmpd="sng">
+            <a:solidFill>
+              <a:srgbClr val="38BDF8"/>
+            </a:solidFill>
+            <a:prstDash val="solid"/>
+            <a:round/>
+            <a:headEnd type="none" w="sm" len="sm"/>
+            <a:tailEnd type="none" w="sm" len="sm"/>
+          </a:ln>
+        </p:spPr>
+        <p:txBody>
+          <a:bodyPr spcFirstLastPara="1" wrap="square" lIns="91425" tIns="45700" rIns="91425" bIns="45700" anchor="ctr" anchorCtr="0">
+            <a:noAutofit/>
+          </a:bodyPr>
+          <a:lstStyle/>
+          <a:p>
+            <a:pPr marL="0" marR="0" lvl="0" indent="0" algn="ctr" rtl="0">
+              <a:spcBef>
+                <a:spcPts val="0"/>
+              </a:spcBef>
+              <a:spcAft>
+                <a:spcPts val="0"/>
+              </a:spcAft>
+              <a:buNone/>
+            </a:pPr>
+            <a:endParaRPr sz="1800" b="0" i="0" u="none" strike="noStrike" cap="none">
+              <a:solidFill>
+                <a:schemeClr val="dk1"/>
+              </a:solidFill>
+              <a:latin typeface="Calibri" panose="020F0502020204030204" pitchFamily="34" charset="0"/>
+              <a:ea typeface="Calibri" panose="020F0502020204030204" pitchFamily="34" charset="0"/>
+              <a:cs typeface="Calibri" panose="020F0502020204030204" pitchFamily="34" charset="0"/>
+              <a:sym typeface="Calibri"/>
+            </a:endParaRPr>
+          </a:p>
+        </p:txBody>
+      </p:sp>
+      <p:sp>
+        <p:nvSpPr>
+          <p:cNvPr id="195" name="Google Shape;195;p20"/>
+          <p:cNvSpPr/>
+          <p:nvPr/>
+        </p:nvSpPr>
+        <p:spPr>
+          <a:xfrm>
+            <a:off x="4563740" y="4076700"/>
+            <a:ext cx="228600" cy="228600"/>
+          </a:xfrm>
+          <a:prstGeom prst="roundRect">
+            <a:avLst>
+              <a:gd name="adj" fmla="val 50000"/>
+            </a:avLst>
+          </a:prstGeom>
+          <a:solidFill>
+            <a:srgbClr val="0B1120"/>
+          </a:solidFill>
+          <a:ln w="38100" cap="flat" cmpd="sng">
+            <a:solidFill>
+              <a:srgbClr val="38BDF8"/>
+            </a:solidFill>
+            <a:prstDash val="solid"/>
+            <a:round/>
+            <a:headEnd type="none" w="sm" len="sm"/>
+            <a:tailEnd type="none" w="sm" len="sm"/>
+          </a:ln>
+        </p:spPr>
+        <p:txBody>
+          <a:bodyPr spcFirstLastPara="1" wrap="square" lIns="91425" tIns="45700" rIns="91425" bIns="45700" anchor="ctr" anchorCtr="0">
+            <a:noAutofit/>
+          </a:bodyPr>
+          <a:lstStyle/>
+          <a:p>
+            <a:pPr marL="0" marR="0" lvl="0" indent="0" algn="ctr" rtl="0">
+              <a:spcBef>
+                <a:spcPts val="0"/>
+              </a:spcBef>
+              <a:spcAft>
+                <a:spcPts val="0"/>
+              </a:spcAft>
+              <a:buNone/>
+            </a:pPr>
+            <a:endParaRPr sz="1800" b="0" i="0" u="none" strike="noStrike" cap="none">
+              <a:solidFill>
+                <a:schemeClr val="dk1"/>
+              </a:solidFill>
+              <a:latin typeface="Calibri" panose="020F0502020204030204" pitchFamily="34" charset="0"/>
+              <a:ea typeface="Calibri" panose="020F0502020204030204" pitchFamily="34" charset="0"/>
+              <a:cs typeface="Calibri" panose="020F0502020204030204" pitchFamily="34" charset="0"/>
+              <a:sym typeface="Calibri"/>
+            </a:endParaRPr>
+          </a:p>
+        </p:txBody>
+      </p:sp>
+      <p:sp>
+        <p:nvSpPr>
+          <p:cNvPr id="196" name="Google Shape;196;p20"/>
+          <p:cNvSpPr/>
+          <p:nvPr/>
+        </p:nvSpPr>
+        <p:spPr>
+          <a:xfrm>
+            <a:off x="7399659" y="4076700"/>
+            <a:ext cx="228600" cy="228600"/>
+          </a:xfrm>
+          <a:prstGeom prst="roundRect">
+            <a:avLst>
+              <a:gd name="adj" fmla="val 50000"/>
+            </a:avLst>
+          </a:prstGeom>
+          <a:solidFill>
+            <a:srgbClr val="0B1120"/>
+          </a:solidFill>
+          <a:ln w="38100" cap="flat" cmpd="sng">
+            <a:solidFill>
+              <a:srgbClr val="38BDF8"/>
+            </a:solidFill>
+            <a:prstDash val="solid"/>
+            <a:round/>
+            <a:headEnd type="none" w="sm" len="sm"/>
+            <a:tailEnd type="none" w="sm" len="sm"/>
+          </a:ln>
+        </p:spPr>
+        <p:txBody>
+          <a:bodyPr spcFirstLastPara="1" wrap="square" lIns="91425" tIns="45700" rIns="91425" bIns="45700" anchor="ctr" anchorCtr="0">
+            <a:noAutofit/>
+          </a:bodyPr>
+          <a:lstStyle/>
+          <a:p>
+            <a:pPr marL="0" marR="0" lvl="0" indent="0" algn="ctr" rtl="0">
+              <a:spcBef>
+                <a:spcPts val="0"/>
+              </a:spcBef>
+              <a:spcAft>
+                <a:spcPts val="0"/>
+              </a:spcAft>
+              <a:buNone/>
+            </a:pPr>
+            <a:endParaRPr sz="1800" b="0" i="0" u="none" strike="noStrike" cap="none">
+              <a:solidFill>
+                <a:schemeClr val="dk1"/>
+              </a:solidFill>
+              <a:latin typeface="Calibri" panose="020F0502020204030204" pitchFamily="34" charset="0"/>
+              <a:ea typeface="Calibri" panose="020F0502020204030204" pitchFamily="34" charset="0"/>
+              <a:cs typeface="Calibri" panose="020F0502020204030204" pitchFamily="34" charset="0"/>
+              <a:sym typeface="Calibri"/>
+            </a:endParaRPr>
+          </a:p>
+        </p:txBody>
+      </p:sp>
+      <p:sp>
+        <p:nvSpPr>
+          <p:cNvPr id="197" name="Google Shape;197;p20"/>
+          <p:cNvSpPr/>
+          <p:nvPr/>
+        </p:nvSpPr>
+        <p:spPr>
+          <a:xfrm>
+            <a:off x="10235579" y="4076700"/>
+            <a:ext cx="228600" cy="228600"/>
+          </a:xfrm>
+          <a:prstGeom prst="roundRect">
+            <a:avLst>
+              <a:gd name="adj" fmla="val 50000"/>
+            </a:avLst>
+          </a:prstGeom>
+          <a:solidFill>
+            <a:srgbClr val="0B1120"/>
+          </a:solidFill>
+          <a:ln w="38100" cap="flat" cmpd="sng">
+            <a:solidFill>
+              <a:srgbClr val="38BDF8"/>
+            </a:solidFill>
+            <a:prstDash val="solid"/>
+            <a:round/>
+            <a:headEnd type="none" w="sm" len="sm"/>
+            <a:tailEnd type="none" w="sm" len="sm"/>
+          </a:ln>
+        </p:spPr>
+        <p:txBody>
+          <a:bodyPr spcFirstLastPara="1" wrap="square" lIns="91425" tIns="45700" rIns="91425" bIns="45700" anchor="ctr" anchorCtr="0">
+            <a:noAutofit/>
+          </a:bodyPr>
+          <a:lstStyle/>
+          <a:p>
+            <a:pPr marL="0" marR="0" lvl="0" indent="0" algn="ctr" rtl="0">
+              <a:spcBef>
+                <a:spcPts val="0"/>
+              </a:spcBef>
+              <a:spcAft>
+                <a:spcPts val="0"/>
+              </a:spcAft>
+              <a:buNone/>
+            </a:pPr>
+            <a:endParaRPr sz="1800" b="0" i="0" u="none" strike="noStrike" cap="none">
+              <a:solidFill>
+                <a:schemeClr val="dk1"/>
+              </a:solidFill>
+              <a:latin typeface="Calibri" panose="020F0502020204030204" pitchFamily="34" charset="0"/>
+              <a:ea typeface="Calibri" panose="020F0502020204030204" pitchFamily="34" charset="0"/>
+              <a:cs typeface="Calibri" panose="020F0502020204030204" pitchFamily="34" charset="0"/>
+              <a:sym typeface="Calibri"/>
+            </a:endParaRPr>
+          </a:p>
+        </p:txBody>
+      </p:sp>
+      <p:sp>
+        <p:nvSpPr>
+          <p:cNvPr id="198" name="Google Shape;198;p20"/>
+          <p:cNvSpPr txBox="1"/>
+          <p:nvPr/>
+        </p:nvSpPr>
+        <p:spPr>
+          <a:xfrm>
+            <a:off x="571500" y="571500"/>
+            <a:ext cx="11601450" cy="615553"/>
+          </a:xfrm>
+          <a:prstGeom prst="rect">
+            <a:avLst/>
+          </a:prstGeom>
+          <a:noFill/>
+          <a:ln>
+            <a:noFill/>
+          </a:ln>
+        </p:spPr>
+        <p:txBody>
+          <a:bodyPr spcFirstLastPara="1" wrap="square" lIns="0" tIns="0" rIns="0" bIns="0" anchor="t" anchorCtr="0">
+            <a:spAutoFit/>
+          </a:bodyPr>
+          <a:lstStyle/>
+          <a:p>
+            <a:pPr marL="0" marR="0" lvl="0" indent="0" algn="l" rtl="0">
+              <a:spcBef>
+                <a:spcPts val="0"/>
+              </a:spcBef>
+              <a:spcAft>
+                <a:spcPts val="0"/>
+              </a:spcAft>
+              <a:buNone/>
+            </a:pPr>
+            <a:r>
+              <a:rPr lang="en-US" sz="4000" b="0" i="0" u="none" strike="noStrike" cap="none" dirty="0" err="1">
+                <a:solidFill>
+                  <a:srgbClr val="38BDF8"/>
+                </a:solidFill>
+                <a:latin typeface="Calibri" panose="020F0502020204030204" pitchFamily="34" charset="0"/>
+                <a:ea typeface="Calibri" panose="020F0502020204030204" pitchFamily="34" charset="0"/>
+                <a:cs typeface="Calibri" panose="020F0502020204030204" pitchFamily="34" charset="0"/>
+                <a:sym typeface="Poppins SemiBold"/>
+              </a:rPr>
+              <a:t>Перспективы</a:t>
+            </a:r>
+            <a:r>
+              <a:rPr lang="en-US" sz="4000" b="0" i="0" u="none" strike="noStrike" cap="none" dirty="0">
+                <a:solidFill>
+                  <a:srgbClr val="38BDF8"/>
+                </a:solidFill>
+                <a:latin typeface="Calibri" panose="020F0502020204030204" pitchFamily="34" charset="0"/>
+                <a:ea typeface="Calibri" panose="020F0502020204030204" pitchFamily="34" charset="0"/>
+                <a:cs typeface="Calibri" panose="020F0502020204030204" pitchFamily="34" charset="0"/>
+                <a:sym typeface="Poppins SemiBold"/>
+              </a:rPr>
+              <a:t> </a:t>
+            </a:r>
+            <a:r>
+              <a:rPr lang="en-US" sz="4000" b="0" i="0" u="none" strike="noStrike" cap="none" dirty="0" err="1">
+                <a:solidFill>
+                  <a:srgbClr val="38BDF8"/>
+                </a:solidFill>
+                <a:latin typeface="Calibri" panose="020F0502020204030204" pitchFamily="34" charset="0"/>
+                <a:ea typeface="Calibri" panose="020F0502020204030204" pitchFamily="34" charset="0"/>
+                <a:cs typeface="Calibri" panose="020F0502020204030204" pitchFamily="34" charset="0"/>
+                <a:sym typeface="Poppins SemiBold"/>
+              </a:rPr>
+              <a:t>развития</a:t>
+            </a:r>
+            <a:endParaRPr sz="4000" dirty="0">
+              <a:latin typeface="Calibri" panose="020F0502020204030204" pitchFamily="34" charset="0"/>
+              <a:ea typeface="Calibri" panose="020F0502020204030204" pitchFamily="34" charset="0"/>
+              <a:cs typeface="Calibri" panose="020F0502020204030204" pitchFamily="34" charset="0"/>
+            </a:endParaRPr>
+          </a:p>
+        </p:txBody>
+      </p:sp>
+    </p:spTree>
+  </p:cSld>
+  <p:clrMapOvr>
+    <a:masterClrMapping/>
+  </p:clrMapOvr>
+</p:sld>
+</file>
+
 <file path=ppt/theme/theme1.xml><?xml version="1.0" encoding="utf-8"?>
 <a:theme xmlns:a="http://schemas.openxmlformats.org/drawingml/2006/main" name="Office Theme">
   <a:themeElements>
